--- a/Python/Lesson 01 - Python Basics/Lesson 1  - Intro to Python.pptx
+++ b/Python/Lesson 01 - Python Basics/Lesson 1  - Intro to Python.pptx
@@ -5,44 +5,45 @@
     <p:sldMasterId id="2147483673" r:id="rId1"/>
   </p:sldMasterIdLst>
   <p:notesMasterIdLst>
-    <p:notesMasterId r:id="rId37"/>
+    <p:notesMasterId r:id="rId38"/>
   </p:notesMasterIdLst>
   <p:sldIdLst>
     <p:sldId id="321" r:id="rId2"/>
     <p:sldId id="328" r:id="rId3"/>
     <p:sldId id="329" r:id="rId4"/>
-    <p:sldId id="304" r:id="rId5"/>
-    <p:sldId id="276" r:id="rId6"/>
-    <p:sldId id="305" r:id="rId7"/>
-    <p:sldId id="277" r:id="rId8"/>
-    <p:sldId id="300" r:id="rId9"/>
-    <p:sldId id="284" r:id="rId10"/>
-    <p:sldId id="324" r:id="rId11"/>
-    <p:sldId id="291" r:id="rId12"/>
-    <p:sldId id="323" r:id="rId13"/>
-    <p:sldId id="292" r:id="rId14"/>
-    <p:sldId id="285" r:id="rId15"/>
-    <p:sldId id="306" r:id="rId16"/>
-    <p:sldId id="301" r:id="rId17"/>
-    <p:sldId id="308" r:id="rId18"/>
-    <p:sldId id="325" r:id="rId19"/>
-    <p:sldId id="326" r:id="rId20"/>
-    <p:sldId id="287" r:id="rId21"/>
-    <p:sldId id="307" r:id="rId22"/>
-    <p:sldId id="293" r:id="rId23"/>
-    <p:sldId id="309" r:id="rId24"/>
-    <p:sldId id="289" r:id="rId25"/>
-    <p:sldId id="310" r:id="rId26"/>
-    <p:sldId id="311" r:id="rId27"/>
-    <p:sldId id="322" r:id="rId28"/>
-    <p:sldId id="330" r:id="rId29"/>
-    <p:sldId id="331" r:id="rId30"/>
-    <p:sldId id="332" r:id="rId31"/>
-    <p:sldId id="333" r:id="rId32"/>
-    <p:sldId id="334" r:id="rId33"/>
-    <p:sldId id="312" r:id="rId34"/>
-    <p:sldId id="327" r:id="rId35"/>
-    <p:sldId id="313" r:id="rId36"/>
+    <p:sldId id="486" r:id="rId5"/>
+    <p:sldId id="304" r:id="rId6"/>
+    <p:sldId id="276" r:id="rId7"/>
+    <p:sldId id="305" r:id="rId8"/>
+    <p:sldId id="277" r:id="rId9"/>
+    <p:sldId id="300" r:id="rId10"/>
+    <p:sldId id="284" r:id="rId11"/>
+    <p:sldId id="324" r:id="rId12"/>
+    <p:sldId id="291" r:id="rId13"/>
+    <p:sldId id="323" r:id="rId14"/>
+    <p:sldId id="292" r:id="rId15"/>
+    <p:sldId id="285" r:id="rId16"/>
+    <p:sldId id="306" r:id="rId17"/>
+    <p:sldId id="301" r:id="rId18"/>
+    <p:sldId id="308" r:id="rId19"/>
+    <p:sldId id="325" r:id="rId20"/>
+    <p:sldId id="326" r:id="rId21"/>
+    <p:sldId id="287" r:id="rId22"/>
+    <p:sldId id="307" r:id="rId23"/>
+    <p:sldId id="293" r:id="rId24"/>
+    <p:sldId id="309" r:id="rId25"/>
+    <p:sldId id="289" r:id="rId26"/>
+    <p:sldId id="310" r:id="rId27"/>
+    <p:sldId id="311" r:id="rId28"/>
+    <p:sldId id="322" r:id="rId29"/>
+    <p:sldId id="330" r:id="rId30"/>
+    <p:sldId id="331" r:id="rId31"/>
+    <p:sldId id="332" r:id="rId32"/>
+    <p:sldId id="333" r:id="rId33"/>
+    <p:sldId id="334" r:id="rId34"/>
+    <p:sldId id="312" r:id="rId35"/>
+    <p:sldId id="327" r:id="rId36"/>
+    <p:sldId id="313" r:id="rId37"/>
   </p:sldIdLst>
   <p:sldSz cx="9144000" cy="5143500" type="screen16x9"/>
   <p:notesSz cx="6858000" cy="9144000"/>
@@ -867,6 +868,110 @@
   <p:cSld>
     <p:spTree>
       <p:nvGrpSpPr>
+        <p:cNvPr id="1" name="Shape 351"/>
+        <p:cNvGrpSpPr/>
+        <p:nvPr/>
+      </p:nvGrpSpPr>
+      <p:grpSpPr>
+        <a:xfrm>
+          <a:off x="0" y="0"/>
+          <a:ext cx="0" cy="0"/>
+          <a:chOff x="0" y="0"/>
+          <a:chExt cx="0" cy="0"/>
+        </a:xfrm>
+      </p:grpSpPr>
+      <p:sp>
+        <p:nvSpPr>
+          <p:cNvPr id="352" name="Google Shape;352;g364a009736c_2_267:notes"/>
+          <p:cNvSpPr txBox="1">
+            <a:spLocks noGrp="1"/>
+          </p:cNvSpPr>
+          <p:nvPr>
+            <p:ph type="body" idx="1"/>
+          </p:nvPr>
+        </p:nvSpPr>
+        <p:spPr>
+          <a:xfrm>
+            <a:off x="685800" y="4343400"/>
+            <a:ext cx="5486400" cy="4114800"/>
+          </a:xfrm>
+          <a:prstGeom prst="rect">
+            <a:avLst/>
+          </a:prstGeom>
+        </p:spPr>
+        <p:txBody>
+          <a:bodyPr spcFirstLastPara="1" wrap="square" lIns="91425" tIns="91425" rIns="91425" bIns="91425" anchor="t" anchorCtr="0">
+            <a:noAutofit/>
+          </a:bodyPr>
+          <a:lstStyle/>
+          <a:p>
+            <a:pPr marL="0" lvl="0" indent="0" algn="l" rtl="0">
+              <a:spcBef>
+                <a:spcPts val="0"/>
+              </a:spcBef>
+              <a:spcAft>
+                <a:spcPts val="0"/>
+              </a:spcAft>
+              <a:buNone/>
+            </a:pPr>
+            <a:endParaRPr/>
+          </a:p>
+        </p:txBody>
+      </p:sp>
+      <p:sp>
+        <p:nvSpPr>
+          <p:cNvPr id="353" name="Google Shape;353;g364a009736c_2_267:notes"/>
+          <p:cNvSpPr>
+            <a:spLocks noGrp="1" noRot="1" noChangeAspect="1"/>
+          </p:cNvSpPr>
+          <p:nvPr>
+            <p:ph type="sldImg" idx="2"/>
+          </p:nvPr>
+        </p:nvSpPr>
+        <p:spPr>
+          <a:xfrm>
+            <a:off x="381000" y="685800"/>
+            <a:ext cx="6096000" cy="3429000"/>
+          </a:xfrm>
+          <a:custGeom>
+            <a:avLst/>
+            <a:gdLst/>
+            <a:ahLst/>
+            <a:cxnLst/>
+            <a:rect l="l" t="t" r="r" b="b"/>
+            <a:pathLst>
+              <a:path w="120000" h="120000" extrusionOk="0">
+                <a:moveTo>
+                  <a:pt x="0" y="0"/>
+                </a:moveTo>
+                <a:lnTo>
+                  <a:pt x="120000" y="0"/>
+                </a:lnTo>
+                <a:lnTo>
+                  <a:pt x="120000" y="120000"/>
+                </a:lnTo>
+                <a:lnTo>
+                  <a:pt x="0" y="120000"/>
+                </a:lnTo>
+                <a:close/>
+              </a:path>
+            </a:pathLst>
+          </a:custGeom>
+        </p:spPr>
+      </p:sp>
+    </p:spTree>
+  </p:cSld>
+  <p:clrMapOvr>
+    <a:masterClrMapping/>
+  </p:clrMapOvr>
+</p:notes>
+</file>
+
+<file path=ppt/notesSlides/notesSlide11.xml><?xml version="1.0" encoding="utf-8"?>
+<p:notes xmlns:a="http://schemas.openxmlformats.org/drawingml/2006/main" xmlns:r="http://schemas.openxmlformats.org/officeDocument/2006/relationships" xmlns:p="http://schemas.openxmlformats.org/presentationml/2006/main" showMasterSp="0" showMasterPhAnim="0">
+  <p:cSld>
+    <p:spTree>
+      <p:nvGrpSpPr>
         <p:cNvPr id="1" name="Shape 351">
           <a:extLst>
             <a:ext uri="{FF2B5EF4-FFF2-40B4-BE49-F238E27FC236}">
@@ -989,7 +1094,7 @@
 </p:notes>
 </file>
 
-<file path=ppt/notesSlides/notesSlide11.xml><?xml version="1.0" encoding="utf-8"?>
+<file path=ppt/notesSlides/notesSlide12.xml><?xml version="1.0" encoding="utf-8"?>
 <p:notes xmlns:a="http://schemas.openxmlformats.org/drawingml/2006/main" xmlns:r="http://schemas.openxmlformats.org/officeDocument/2006/relationships" xmlns:p="http://schemas.openxmlformats.org/presentationml/2006/main" showMasterSp="0" showMasterPhAnim="0">
   <p:cSld>
     <p:spTree>
@@ -1211,7 +1316,7 @@
                 <a:cs typeface="Arial"/>
                 <a:sym typeface="Arial"/>
               </a:rPr>
-              <a:t>13</a:t>
+              <a:t>14</a:t>
             </a:fld>
             <a:endParaRPr sz="1800">
               <a:solidFill>
@@ -1233,7 +1338,7 @@
 </p:notes>
 </file>
 
-<file path=ppt/notesSlides/notesSlide12.xml><?xml version="1.0" encoding="utf-8"?>
+<file path=ppt/notesSlides/notesSlide13.xml><?xml version="1.0" encoding="utf-8"?>
 <p:notes xmlns:a="http://schemas.openxmlformats.org/drawingml/2006/main" xmlns:r="http://schemas.openxmlformats.org/officeDocument/2006/relationships" xmlns:p="http://schemas.openxmlformats.org/presentationml/2006/main" showMasterSp="0" showMasterPhAnim="0">
   <p:cSld>
     <p:spTree>
@@ -1395,7 +1500,7 @@
                 <a:cs typeface="Arial"/>
                 <a:sym typeface="Arial"/>
               </a:rPr>
-              <a:t>14</a:t>
+              <a:t>15</a:t>
             </a:fld>
             <a:endParaRPr sz="1800">
               <a:solidFill>
@@ -1417,7 +1522,7 @@
 </p:notes>
 </file>
 
-<file path=ppt/notesSlides/notesSlide13.xml><?xml version="1.0" encoding="utf-8"?>
+<file path=ppt/notesSlides/notesSlide14.xml><?xml version="1.0" encoding="utf-8"?>
 <p:notes xmlns:a="http://schemas.openxmlformats.org/drawingml/2006/main" xmlns:r="http://schemas.openxmlformats.org/officeDocument/2006/relationships" xmlns:p="http://schemas.openxmlformats.org/presentationml/2006/main" showMasterSp="0" showMasterPhAnim="0">
   <p:cSld>
     <p:spTree>
@@ -1544,7 +1649,7 @@
 </p:notes>
 </file>
 
-<file path=ppt/notesSlides/notesSlide14.xml><?xml version="1.0" encoding="utf-8"?>
+<file path=ppt/notesSlides/notesSlide15.xml><?xml version="1.0" encoding="utf-8"?>
 <p:notes xmlns:a="http://schemas.openxmlformats.org/drawingml/2006/main" xmlns:r="http://schemas.openxmlformats.org/officeDocument/2006/relationships" xmlns:p="http://schemas.openxmlformats.org/presentationml/2006/main" showMasterSp="0" showMasterPhAnim="0">
   <p:cSld>
     <p:spTree>
@@ -1671,7 +1776,7 @@
 </p:notes>
 </file>
 
-<file path=ppt/notesSlides/notesSlide15.xml><?xml version="1.0" encoding="utf-8"?>
+<file path=ppt/notesSlides/notesSlide16.xml><?xml version="1.0" encoding="utf-8"?>
 <p:notes xmlns:a="http://schemas.openxmlformats.org/drawingml/2006/main" xmlns:r="http://schemas.openxmlformats.org/officeDocument/2006/relationships" xmlns:p="http://schemas.openxmlformats.org/presentationml/2006/main" showMasterSp="0" showMasterPhAnim="0">
   <p:cSld>
     <p:spTree>
@@ -1780,7 +1885,7 @@
 </p:notes>
 </file>
 
-<file path=ppt/notesSlides/notesSlide16.xml><?xml version="1.0" encoding="utf-8"?>
+<file path=ppt/notesSlides/notesSlide17.xml><?xml version="1.0" encoding="utf-8"?>
 <p:notes xmlns:a="http://schemas.openxmlformats.org/drawingml/2006/main" xmlns:r="http://schemas.openxmlformats.org/officeDocument/2006/relationships" xmlns:p="http://schemas.openxmlformats.org/presentationml/2006/main" showMasterSp="0" showMasterPhAnim="0">
   <p:cSld>
     <p:spTree>
@@ -1966,7 +2071,7 @@
                 <a:cs typeface="Arial"/>
                 <a:sym typeface="Arial"/>
               </a:rPr>
-              <a:t>21</a:t>
+              <a:t>22</a:t>
             </a:fld>
             <a:endParaRPr sz="1800">
               <a:solidFill>
@@ -1993,7 +2098,7 @@
 </p:notes>
 </file>
 
-<file path=ppt/notesSlides/notesSlide17.xml><?xml version="1.0" encoding="utf-8"?>
+<file path=ppt/notesSlides/notesSlide18.xml><?xml version="1.0" encoding="utf-8"?>
 <p:notes xmlns:a="http://schemas.openxmlformats.org/drawingml/2006/main" xmlns:r="http://schemas.openxmlformats.org/officeDocument/2006/relationships" xmlns:p="http://schemas.openxmlformats.org/presentationml/2006/main" showMasterSp="0" showMasterPhAnim="0">
   <p:cSld>
     <p:spTree>
@@ -2155,7 +2260,7 @@
                 <a:cs typeface="Arial"/>
                 <a:sym typeface="Arial"/>
               </a:rPr>
-              <a:t>22</a:t>
+              <a:t>23</a:t>
             </a:fld>
             <a:endParaRPr sz="1800">
               <a:solidFill>
@@ -2177,7 +2282,7 @@
 </p:notes>
 </file>
 
-<file path=ppt/notesSlides/notesSlide18.xml><?xml version="1.0" encoding="utf-8"?>
+<file path=ppt/notesSlides/notesSlide19.xml><?xml version="1.0" encoding="utf-8"?>
 <p:notes xmlns:a="http://schemas.openxmlformats.org/drawingml/2006/main" xmlns:r="http://schemas.openxmlformats.org/officeDocument/2006/relationships" xmlns:p="http://schemas.openxmlformats.org/presentationml/2006/main" showMasterSp="0" showMasterPhAnim="0">
   <p:cSld>
     <p:spTree>
@@ -2363,7 +2468,7 @@
                 <a:cs typeface="Arial"/>
                 <a:sym typeface="Arial"/>
               </a:rPr>
-              <a:t>23</a:t>
+              <a:t>24</a:t>
             </a:fld>
             <a:endParaRPr sz="1800">
               <a:solidFill>
@@ -2383,110 +2488,6 @@
         <p14:creationId xmlns:p14="http://schemas.microsoft.com/office/powerpoint/2010/main" val="1210229669"/>
       </p:ext>
     </p:extLst>
-  </p:cSld>
-  <p:clrMapOvr>
-    <a:masterClrMapping/>
-  </p:clrMapOvr>
-</p:notes>
-</file>
-
-<file path=ppt/notesSlides/notesSlide19.xml><?xml version="1.0" encoding="utf-8"?>
-<p:notes xmlns:a="http://schemas.openxmlformats.org/drawingml/2006/main" xmlns:r="http://schemas.openxmlformats.org/officeDocument/2006/relationships" xmlns:p="http://schemas.openxmlformats.org/presentationml/2006/main" showMasterSp="0" showMasterPhAnim="0">
-  <p:cSld>
-    <p:spTree>
-      <p:nvGrpSpPr>
-        <p:cNvPr id="1" name="Shape 339"/>
-        <p:cNvGrpSpPr/>
-        <p:nvPr/>
-      </p:nvGrpSpPr>
-      <p:grpSpPr>
-        <a:xfrm>
-          <a:off x="0" y="0"/>
-          <a:ext cx="0" cy="0"/>
-          <a:chOff x="0" y="0"/>
-          <a:chExt cx="0" cy="0"/>
-        </a:xfrm>
-      </p:grpSpPr>
-      <p:sp>
-        <p:nvSpPr>
-          <p:cNvPr id="340" name="Google Shape;340;g364a009736c_2_257:notes"/>
-          <p:cNvSpPr txBox="1">
-            <a:spLocks noGrp="1"/>
-          </p:cNvSpPr>
-          <p:nvPr>
-            <p:ph type="body" idx="1"/>
-          </p:nvPr>
-        </p:nvSpPr>
-        <p:spPr>
-          <a:xfrm>
-            <a:off x="685800" y="4343400"/>
-            <a:ext cx="5486400" cy="4114800"/>
-          </a:xfrm>
-          <a:prstGeom prst="rect">
-            <a:avLst/>
-          </a:prstGeom>
-        </p:spPr>
-        <p:txBody>
-          <a:bodyPr spcFirstLastPara="1" wrap="square" lIns="91425" tIns="91425" rIns="91425" bIns="91425" anchor="t" anchorCtr="0">
-            <a:noAutofit/>
-          </a:bodyPr>
-          <a:lstStyle/>
-          <a:p>
-            <a:pPr marL="0" lvl="0" indent="0" algn="l" rtl="0">
-              <a:spcBef>
-                <a:spcPts val="0"/>
-              </a:spcBef>
-              <a:spcAft>
-                <a:spcPts val="0"/>
-              </a:spcAft>
-              <a:buNone/>
-            </a:pPr>
-            <a:endParaRPr/>
-          </a:p>
-        </p:txBody>
-      </p:sp>
-      <p:sp>
-        <p:nvSpPr>
-          <p:cNvPr id="341" name="Google Shape;341;g364a009736c_2_257:notes"/>
-          <p:cNvSpPr>
-            <a:spLocks noGrp="1" noRot="1" noChangeAspect="1"/>
-          </p:cNvSpPr>
-          <p:nvPr>
-            <p:ph type="sldImg" idx="2"/>
-          </p:nvPr>
-        </p:nvSpPr>
-        <p:spPr>
-          <a:xfrm>
-            <a:off x="381000" y="685800"/>
-            <a:ext cx="6096000" cy="3429000"/>
-          </a:xfrm>
-          <a:custGeom>
-            <a:avLst/>
-            <a:gdLst/>
-            <a:ahLst/>
-            <a:cxnLst/>
-            <a:rect l="l" t="t" r="r" b="b"/>
-            <a:pathLst>
-              <a:path w="120000" h="120000" extrusionOk="0">
-                <a:moveTo>
-                  <a:pt x="0" y="0"/>
-                </a:moveTo>
-                <a:lnTo>
-                  <a:pt x="120000" y="0"/>
-                </a:lnTo>
-                <a:lnTo>
-                  <a:pt x="120000" y="120000"/>
-                </a:lnTo>
-                <a:lnTo>
-                  <a:pt x="0" y="120000"/>
-                </a:lnTo>
-                <a:close/>
-              </a:path>
-            </a:pathLst>
-          </a:custGeom>
-        </p:spPr>
-      </p:sp>
-    </p:spTree>
   </p:cSld>
   <p:clrMapOvr>
     <a:masterClrMapping/>
@@ -2626,6 +2627,110 @@
   <p:cSld>
     <p:spTree>
       <p:nvGrpSpPr>
+        <p:cNvPr id="1" name="Shape 339"/>
+        <p:cNvGrpSpPr/>
+        <p:nvPr/>
+      </p:nvGrpSpPr>
+      <p:grpSpPr>
+        <a:xfrm>
+          <a:off x="0" y="0"/>
+          <a:ext cx="0" cy="0"/>
+          <a:chOff x="0" y="0"/>
+          <a:chExt cx="0" cy="0"/>
+        </a:xfrm>
+      </p:grpSpPr>
+      <p:sp>
+        <p:nvSpPr>
+          <p:cNvPr id="340" name="Google Shape;340;g364a009736c_2_257:notes"/>
+          <p:cNvSpPr txBox="1">
+            <a:spLocks noGrp="1"/>
+          </p:cNvSpPr>
+          <p:nvPr>
+            <p:ph type="body" idx="1"/>
+          </p:nvPr>
+        </p:nvSpPr>
+        <p:spPr>
+          <a:xfrm>
+            <a:off x="685800" y="4343400"/>
+            <a:ext cx="5486400" cy="4114800"/>
+          </a:xfrm>
+          <a:prstGeom prst="rect">
+            <a:avLst/>
+          </a:prstGeom>
+        </p:spPr>
+        <p:txBody>
+          <a:bodyPr spcFirstLastPara="1" wrap="square" lIns="91425" tIns="91425" rIns="91425" bIns="91425" anchor="t" anchorCtr="0">
+            <a:noAutofit/>
+          </a:bodyPr>
+          <a:lstStyle/>
+          <a:p>
+            <a:pPr marL="0" lvl="0" indent="0" algn="l" rtl="0">
+              <a:spcBef>
+                <a:spcPts val="0"/>
+              </a:spcBef>
+              <a:spcAft>
+                <a:spcPts val="0"/>
+              </a:spcAft>
+              <a:buNone/>
+            </a:pPr>
+            <a:endParaRPr/>
+          </a:p>
+        </p:txBody>
+      </p:sp>
+      <p:sp>
+        <p:nvSpPr>
+          <p:cNvPr id="341" name="Google Shape;341;g364a009736c_2_257:notes"/>
+          <p:cNvSpPr>
+            <a:spLocks noGrp="1" noRot="1" noChangeAspect="1"/>
+          </p:cNvSpPr>
+          <p:nvPr>
+            <p:ph type="sldImg" idx="2"/>
+          </p:nvPr>
+        </p:nvSpPr>
+        <p:spPr>
+          <a:xfrm>
+            <a:off x="381000" y="685800"/>
+            <a:ext cx="6096000" cy="3429000"/>
+          </a:xfrm>
+          <a:custGeom>
+            <a:avLst/>
+            <a:gdLst/>
+            <a:ahLst/>
+            <a:cxnLst/>
+            <a:rect l="l" t="t" r="r" b="b"/>
+            <a:pathLst>
+              <a:path w="120000" h="120000" extrusionOk="0">
+                <a:moveTo>
+                  <a:pt x="0" y="0"/>
+                </a:moveTo>
+                <a:lnTo>
+                  <a:pt x="120000" y="0"/>
+                </a:lnTo>
+                <a:lnTo>
+                  <a:pt x="120000" y="120000"/>
+                </a:lnTo>
+                <a:lnTo>
+                  <a:pt x="0" y="120000"/>
+                </a:lnTo>
+                <a:close/>
+              </a:path>
+            </a:pathLst>
+          </a:custGeom>
+        </p:spPr>
+      </p:sp>
+    </p:spTree>
+  </p:cSld>
+  <p:clrMapOvr>
+    <a:masterClrMapping/>
+  </p:clrMapOvr>
+</p:notes>
+</file>
+
+<file path=ppt/notesSlides/notesSlide21.xml><?xml version="1.0" encoding="utf-8"?>
+<p:notes xmlns:a="http://schemas.openxmlformats.org/drawingml/2006/main" xmlns:r="http://schemas.openxmlformats.org/officeDocument/2006/relationships" xmlns:p="http://schemas.openxmlformats.org/presentationml/2006/main" showMasterSp="0" showMasterPhAnim="0">
+  <p:cSld>
+    <p:spTree>
+      <p:nvGrpSpPr>
         <p:cNvPr id="1" name="Shape 339">
           <a:extLst>
             <a:ext uri="{FF2B5EF4-FFF2-40B4-BE49-F238E27FC236}">
@@ -2748,7 +2853,7 @@
 </p:notes>
 </file>
 
-<file path=ppt/notesSlides/notesSlide21.xml><?xml version="1.0" encoding="utf-8"?>
+<file path=ppt/notesSlides/notesSlide22.xml><?xml version="1.0" encoding="utf-8"?>
 <p:notes xmlns:a="http://schemas.openxmlformats.org/drawingml/2006/main" xmlns:r="http://schemas.openxmlformats.org/officeDocument/2006/relationships" xmlns:p="http://schemas.openxmlformats.org/presentationml/2006/main" showMasterSp="0" showMasterPhAnim="0">
   <p:cSld>
     <p:spTree>
@@ -2934,7 +3039,7 @@
                 <a:cs typeface="Arial"/>
                 <a:sym typeface="Arial"/>
               </a:rPr>
-              <a:t>33</a:t>
+              <a:t>34</a:t>
             </a:fld>
             <a:endParaRPr sz="1800">
               <a:solidFill>
@@ -2961,7 +3066,7 @@
 </p:notes>
 </file>
 
-<file path=ppt/notesSlides/notesSlide22.xml><?xml version="1.0" encoding="utf-8"?>
+<file path=ppt/notesSlides/notesSlide23.xml><?xml version="1.0" encoding="utf-8"?>
 <p:notes xmlns:a="http://schemas.openxmlformats.org/drawingml/2006/main" xmlns:r="http://schemas.openxmlformats.org/officeDocument/2006/relationships" xmlns:p="http://schemas.openxmlformats.org/presentationml/2006/main" showMasterSp="0" showMasterPhAnim="0">
   <p:cSld>
     <p:spTree>
@@ -3147,7 +3252,7 @@
                 <a:cs typeface="Arial"/>
                 <a:sym typeface="Arial"/>
               </a:rPr>
-              <a:t>34</a:t>
+              <a:t>35</a:t>
             </a:fld>
             <a:endParaRPr sz="1800">
               <a:solidFill>
@@ -3175,6 +3280,119 @@
 </file>
 
 <file path=ppt/notesSlides/notesSlide3.xml><?xml version="1.0" encoding="utf-8"?>
+<p:notes xmlns:a="http://schemas.openxmlformats.org/drawingml/2006/main" xmlns:r="http://schemas.openxmlformats.org/officeDocument/2006/relationships" xmlns:p="http://schemas.openxmlformats.org/presentationml/2006/main">
+  <p:cSld>
+    <p:spTree>
+      <p:nvGrpSpPr>
+        <p:cNvPr id="1" name="">
+          <a:extLst>
+            <a:ext uri="{FF2B5EF4-FFF2-40B4-BE49-F238E27FC236}">
+              <a16:creationId xmlns:a16="http://schemas.microsoft.com/office/drawing/2014/main" id="{1CD64719-007A-9D20-6D43-3A4FCAADACE1}"/>
+            </a:ext>
+          </a:extLst>
+        </p:cNvPr>
+        <p:cNvGrpSpPr/>
+        <p:nvPr/>
+      </p:nvGrpSpPr>
+      <p:grpSpPr>
+        <a:xfrm>
+          <a:off x="0" y="0"/>
+          <a:ext cx="0" cy="0"/>
+          <a:chOff x="0" y="0"/>
+          <a:chExt cx="0" cy="0"/>
+        </a:xfrm>
+      </p:grpSpPr>
+      <p:sp>
+        <p:nvSpPr>
+          <p:cNvPr id="2" name="Slide Image Placeholder 1">
+            <a:extLst>
+              <a:ext uri="{FF2B5EF4-FFF2-40B4-BE49-F238E27FC236}">
+                <a16:creationId xmlns:a16="http://schemas.microsoft.com/office/drawing/2014/main" id="{E432F23C-3B6C-06AD-FDEF-F55DEF812C1E}"/>
+              </a:ext>
+            </a:extLst>
+          </p:cNvPr>
+          <p:cNvSpPr>
+            <a:spLocks noGrp="1" noRot="1" noChangeAspect="1"/>
+          </p:cNvSpPr>
+          <p:nvPr>
+            <p:ph type="sldImg"/>
+          </p:nvPr>
+        </p:nvSpPr>
+        <p:spPr>
+          <a:xfrm>
+            <a:off x="381000" y="685800"/>
+            <a:ext cx="6096000" cy="3429000"/>
+          </a:xfrm>
+        </p:spPr>
+      </p:sp>
+      <p:sp>
+        <p:nvSpPr>
+          <p:cNvPr id="3" name="Notes Placeholder 2">
+            <a:extLst>
+              <a:ext uri="{FF2B5EF4-FFF2-40B4-BE49-F238E27FC236}">
+                <a16:creationId xmlns:a16="http://schemas.microsoft.com/office/drawing/2014/main" id="{0784E9A6-CB51-3C7D-DF18-0DDEC1AC4207}"/>
+              </a:ext>
+            </a:extLst>
+          </p:cNvPr>
+          <p:cNvSpPr>
+            <a:spLocks noGrp="1"/>
+          </p:cNvSpPr>
+          <p:nvPr>
+            <p:ph type="body" idx="1"/>
+          </p:nvPr>
+        </p:nvSpPr>
+        <p:spPr/>
+        <p:txBody>
+          <a:bodyPr/>
+          <a:lstStyle/>
+          <a:p>
+            <a:endParaRPr lang="en-US" dirty="0"/>
+          </a:p>
+        </p:txBody>
+      </p:sp>
+      <p:sp>
+        <p:nvSpPr>
+          <p:cNvPr id="4" name="Slide Number Placeholder 3">
+            <a:extLst>
+              <a:ext uri="{FF2B5EF4-FFF2-40B4-BE49-F238E27FC236}">
+                <a16:creationId xmlns:a16="http://schemas.microsoft.com/office/drawing/2014/main" id="{D045C7A3-AEE3-A283-A203-B801AB559F92}"/>
+              </a:ext>
+            </a:extLst>
+          </p:cNvPr>
+          <p:cNvSpPr>
+            <a:spLocks noGrp="1"/>
+          </p:cNvSpPr>
+          <p:nvPr>
+            <p:ph type="sldNum" sz="quarter" idx="5"/>
+          </p:nvPr>
+        </p:nvSpPr>
+        <p:spPr/>
+        <p:txBody>
+          <a:bodyPr/>
+          <a:lstStyle/>
+          <a:p>
+            <a:fld id="{292570D5-C374-43AE-876B-55C2A221664E}" type="slidenum">
+              <a:rPr lang="en-US" smtClean="0"/>
+              <a:t>4</a:t>
+            </a:fld>
+            <a:endParaRPr lang="en-US"/>
+          </a:p>
+        </p:txBody>
+      </p:sp>
+    </p:spTree>
+    <p:extLst>
+      <p:ext uri="{BB962C8B-B14F-4D97-AF65-F5344CB8AC3E}">
+        <p14:creationId xmlns:p14="http://schemas.microsoft.com/office/powerpoint/2010/main" val="2731214060"/>
+      </p:ext>
+    </p:extLst>
+  </p:cSld>
+  <p:clrMapOvr>
+    <a:masterClrMapping/>
+  </p:clrMapOvr>
+</p:notes>
+</file>
+
+<file path=ppt/notesSlides/notesSlide4.xml><?xml version="1.0" encoding="utf-8"?>
 <p:notes xmlns:a="http://schemas.openxmlformats.org/drawingml/2006/main" xmlns:r="http://schemas.openxmlformats.org/officeDocument/2006/relationships" xmlns:p="http://schemas.openxmlformats.org/presentationml/2006/main" showMasterSp="0" showMasterPhAnim="0">
   <p:cSld>
     <p:spTree>
@@ -3301,7 +3519,7 @@
 </p:notes>
 </file>
 
-<file path=ppt/notesSlides/notesSlide4.xml><?xml version="1.0" encoding="utf-8"?>
+<file path=ppt/notesSlides/notesSlide5.xml><?xml version="1.0" encoding="utf-8"?>
 <p:notes xmlns:a="http://schemas.openxmlformats.org/drawingml/2006/main" xmlns:r="http://schemas.openxmlformats.org/officeDocument/2006/relationships" xmlns:p="http://schemas.openxmlformats.org/presentationml/2006/main" showMasterSp="0" showMasterPhAnim="0">
   <p:cSld>
     <p:spTree>
@@ -3405,7 +3623,7 @@
 </p:notes>
 </file>
 
-<file path=ppt/notesSlides/notesSlide5.xml><?xml version="1.0" encoding="utf-8"?>
+<file path=ppt/notesSlides/notesSlide6.xml><?xml version="1.0" encoding="utf-8"?>
 <p:notes xmlns:a="http://schemas.openxmlformats.org/drawingml/2006/main" xmlns:r="http://schemas.openxmlformats.org/officeDocument/2006/relationships" xmlns:p="http://schemas.openxmlformats.org/presentationml/2006/main" showMasterSp="0" showMasterPhAnim="0">
   <p:cSld>
     <p:spTree>
@@ -3509,7 +3727,7 @@
 </p:notes>
 </file>
 
-<file path=ppt/notesSlides/notesSlide6.xml><?xml version="1.0" encoding="utf-8"?>
+<file path=ppt/notesSlides/notesSlide7.xml><?xml version="1.0" encoding="utf-8"?>
 <p:notes xmlns:a="http://schemas.openxmlformats.org/drawingml/2006/main" xmlns:r="http://schemas.openxmlformats.org/officeDocument/2006/relationships" xmlns:p="http://schemas.openxmlformats.org/presentationml/2006/main">
   <p:cSld>
     <p:spTree>
@@ -3587,7 +3805,7 @@
 </p:notes>
 </file>
 
-<file path=ppt/notesSlides/notesSlide7.xml><?xml version="1.0" encoding="utf-8"?>
+<file path=ppt/notesSlides/notesSlide8.xml><?xml version="1.0" encoding="utf-8"?>
 <p:notes xmlns:a="http://schemas.openxmlformats.org/drawingml/2006/main" xmlns:r="http://schemas.openxmlformats.org/officeDocument/2006/relationships" xmlns:p="http://schemas.openxmlformats.org/presentationml/2006/main" showMasterSp="0" showMasterPhAnim="0">
   <p:cSld>
     <p:spTree>
@@ -3929,7 +4147,7 @@
                 <a:cs typeface="Arial"/>
                 <a:sym typeface="Arial"/>
               </a:rPr>
-              <a:t>9</a:t>
+              <a:t>10</a:t>
             </a:fld>
             <a:endParaRPr sz="1800">
               <a:solidFill>
@@ -3951,7 +4169,7 @@
 </p:notes>
 </file>
 
-<file path=ppt/notesSlides/notesSlide8.xml><?xml version="1.0" encoding="utf-8"?>
+<file path=ppt/notesSlides/notesSlide9.xml><?xml version="1.0" encoding="utf-8"?>
 <p:notes xmlns:a="http://schemas.openxmlformats.org/drawingml/2006/main" xmlns:r="http://schemas.openxmlformats.org/officeDocument/2006/relationships" xmlns:p="http://schemas.openxmlformats.org/presentationml/2006/main" showMasterSp="0" showMasterPhAnim="0">
   <p:cSld>
     <p:spTree>
@@ -4078,110 +4296,6 @@
 </p:notes>
 </file>
 
-<file path=ppt/notesSlides/notesSlide9.xml><?xml version="1.0" encoding="utf-8"?>
-<p:notes xmlns:a="http://schemas.openxmlformats.org/drawingml/2006/main" xmlns:r="http://schemas.openxmlformats.org/officeDocument/2006/relationships" xmlns:p="http://schemas.openxmlformats.org/presentationml/2006/main" showMasterSp="0" showMasterPhAnim="0">
-  <p:cSld>
-    <p:spTree>
-      <p:nvGrpSpPr>
-        <p:cNvPr id="1" name="Shape 351"/>
-        <p:cNvGrpSpPr/>
-        <p:nvPr/>
-      </p:nvGrpSpPr>
-      <p:grpSpPr>
-        <a:xfrm>
-          <a:off x="0" y="0"/>
-          <a:ext cx="0" cy="0"/>
-          <a:chOff x="0" y="0"/>
-          <a:chExt cx="0" cy="0"/>
-        </a:xfrm>
-      </p:grpSpPr>
-      <p:sp>
-        <p:nvSpPr>
-          <p:cNvPr id="352" name="Google Shape;352;g364a009736c_2_267:notes"/>
-          <p:cNvSpPr txBox="1">
-            <a:spLocks noGrp="1"/>
-          </p:cNvSpPr>
-          <p:nvPr>
-            <p:ph type="body" idx="1"/>
-          </p:nvPr>
-        </p:nvSpPr>
-        <p:spPr>
-          <a:xfrm>
-            <a:off x="685800" y="4343400"/>
-            <a:ext cx="5486400" cy="4114800"/>
-          </a:xfrm>
-          <a:prstGeom prst="rect">
-            <a:avLst/>
-          </a:prstGeom>
-        </p:spPr>
-        <p:txBody>
-          <a:bodyPr spcFirstLastPara="1" wrap="square" lIns="91425" tIns="91425" rIns="91425" bIns="91425" anchor="t" anchorCtr="0">
-            <a:noAutofit/>
-          </a:bodyPr>
-          <a:lstStyle/>
-          <a:p>
-            <a:pPr marL="0" lvl="0" indent="0" algn="l" rtl="0">
-              <a:spcBef>
-                <a:spcPts val="0"/>
-              </a:spcBef>
-              <a:spcAft>
-                <a:spcPts val="0"/>
-              </a:spcAft>
-              <a:buNone/>
-            </a:pPr>
-            <a:endParaRPr/>
-          </a:p>
-        </p:txBody>
-      </p:sp>
-      <p:sp>
-        <p:nvSpPr>
-          <p:cNvPr id="353" name="Google Shape;353;g364a009736c_2_267:notes"/>
-          <p:cNvSpPr>
-            <a:spLocks noGrp="1" noRot="1" noChangeAspect="1"/>
-          </p:cNvSpPr>
-          <p:nvPr>
-            <p:ph type="sldImg" idx="2"/>
-          </p:nvPr>
-        </p:nvSpPr>
-        <p:spPr>
-          <a:xfrm>
-            <a:off x="381000" y="685800"/>
-            <a:ext cx="6096000" cy="3429000"/>
-          </a:xfrm>
-          <a:custGeom>
-            <a:avLst/>
-            <a:gdLst/>
-            <a:ahLst/>
-            <a:cxnLst/>
-            <a:rect l="l" t="t" r="r" b="b"/>
-            <a:pathLst>
-              <a:path w="120000" h="120000" extrusionOk="0">
-                <a:moveTo>
-                  <a:pt x="0" y="0"/>
-                </a:moveTo>
-                <a:lnTo>
-                  <a:pt x="120000" y="0"/>
-                </a:lnTo>
-                <a:lnTo>
-                  <a:pt x="120000" y="120000"/>
-                </a:lnTo>
-                <a:lnTo>
-                  <a:pt x="0" y="120000"/>
-                </a:lnTo>
-                <a:close/>
-              </a:path>
-            </a:pathLst>
-          </a:custGeom>
-        </p:spPr>
-      </p:sp>
-    </p:spTree>
-  </p:cSld>
-  <p:clrMapOvr>
-    <a:masterClrMapping/>
-  </p:clrMapOvr>
-</p:notes>
-</file>
-
 <file path=ppt/slideLayouts/slideLayout1.xml><?xml version="1.0" encoding="utf-8"?>
 <p:sldLayout xmlns:a="http://schemas.openxmlformats.org/drawingml/2006/main" xmlns:r="http://schemas.openxmlformats.org/officeDocument/2006/relationships" xmlns:p="http://schemas.openxmlformats.org/presentationml/2006/main" showMasterSp="0" preserve="1" userDrawn="1">
   <p:cSld name="Title Slide">
@@ -4230,7 +4344,7 @@
           <a:p>
             <a:fld id="{7A3E0868-4E26-4CDC-8A56-D70E2D8B12FE}" type="datetime3">
               <a:rPr lang="en-US" smtClean="0"/>
-              <a:t>2 June 2026</a:t>
+              <a:t>3 June 2026</a:t>
             </a:fld>
             <a:endParaRPr lang="en-US"/>
           </a:p>
@@ -6791,7 +6905,7 @@
           <a:p>
             <a:fld id="{A7B8021B-6105-4216-96FC-94348F216D0E}" type="datetime3">
               <a:rPr lang="en-US" smtClean="0"/>
-              <a:t>2 June 2026</a:t>
+              <a:t>3 June 2026</a:t>
             </a:fld>
             <a:endParaRPr lang="en-US"/>
           </a:p>
@@ -8488,7 +8602,7 @@
           <a:p>
             <a:fld id="{5D27CFAB-73E6-44A8-B862-B3306344E3F2}" type="datetime3">
               <a:rPr lang="en-US" smtClean="0"/>
-              <a:t>2 June 2026</a:t>
+              <a:t>3 June 2026</a:t>
             </a:fld>
             <a:endParaRPr lang="en-US"/>
           </a:p>
@@ -10278,7 +10392,7 @@
           <a:p>
             <a:fld id="{A9B2E784-A5F5-4301-881B-94AC8DBF9DED}" type="datetime3">
               <a:rPr lang="en-US" smtClean="0"/>
-              <a:t>2 June 2026</a:t>
+              <a:t>3 June 2026</a:t>
             </a:fld>
             <a:endParaRPr lang="en-US"/>
           </a:p>
@@ -10457,7 +10571,7 @@
           <a:p>
             <a:fld id="{18EAB3A5-9E92-4BB9-8F22-9632B4FBEDBA}" type="datetime3">
               <a:rPr lang="en-US" smtClean="0"/>
-              <a:t>2 June 2026</a:t>
+              <a:t>3 June 2026</a:t>
             </a:fld>
             <a:endParaRPr lang="en-US"/>
           </a:p>
@@ -10684,7 +10798,7 @@
           <a:p>
             <a:fld id="{40923810-5FB2-48C9-96CA-1DE2C4773142}" type="datetime3">
               <a:rPr lang="en-US" smtClean="0"/>
-              <a:t>2 June 2026</a:t>
+              <a:t>3 June 2026</a:t>
             </a:fld>
             <a:endParaRPr lang="en-US"/>
           </a:p>
@@ -10974,7 +11088,7 @@
           <a:p>
             <a:fld id="{E50EFF4B-86EB-42FB-93EA-7D8F9CB2466F}" type="datetime3">
               <a:rPr lang="en-US" smtClean="0"/>
-              <a:t>2 June 2026</a:t>
+              <a:t>3 June 2026</a:t>
             </a:fld>
             <a:endParaRPr lang="en-US"/>
           </a:p>
@@ -11586,7 +11700,7 @@
           <a:p>
             <a:fld id="{FB14FC24-E041-45E9-9A72-E5755A86890F}" type="datetime3">
               <a:rPr lang="en-US" smtClean="0"/>
-              <a:t>2 June 2026</a:t>
+              <a:t>3 June 2026</a:t>
             </a:fld>
             <a:endParaRPr lang="en-US"/>
           </a:p>
@@ -12446,7 +12560,7 @@
           <a:p>
             <a:fld id="{98A19125-94A7-4474-858C-FD9C4ABE9DDA}" type="datetime3">
               <a:rPr lang="en-US" smtClean="0"/>
-              <a:t>2 June 2026</a:t>
+              <a:t>3 June 2026</a:t>
             </a:fld>
             <a:endParaRPr lang="en-US"/>
           </a:p>
@@ -13549,7 +13663,7 @@
           <a:p>
             <a:fld id="{3BA0343D-C8D8-43CE-BB79-50DEA219DB07}" type="datetime3">
               <a:rPr lang="en-US" smtClean="0"/>
-              <a:t>2 June 2026</a:t>
+              <a:t>3 June 2026</a:t>
             </a:fld>
             <a:endParaRPr lang="en-US"/>
           </a:p>
@@ -13838,7 +13952,7 @@
           <a:p>
             <a:fld id="{453BD212-0B9F-4987-965F-AC83B2FC354F}" type="datetime3">
               <a:rPr lang="en-US" smtClean="0"/>
-              <a:t>2 June 2026</a:t>
+              <a:t>3 June 2026</a:t>
             </a:fld>
             <a:endParaRPr lang="en-US"/>
           </a:p>
@@ -14083,7 +14197,7 @@
           <a:p>
             <a:fld id="{6DDC931E-8CBE-4A3F-A034-9B6122C6DCDB}" type="datetime3">
               <a:rPr lang="en-US" smtClean="0"/>
-              <a:t>2 June 2026</a:t>
+              <a:t>3 June 2026</a:t>
             </a:fld>
             <a:endParaRPr lang="en-US"/>
           </a:p>
@@ -15849,7 +15963,7 @@
           <a:p>
             <a:fld id="{220AF9C2-5E8A-4308-AE6B-CA9B65007D0E}" type="datetime3">
               <a:rPr lang="en-US" smtClean="0"/>
-              <a:t>2 June 2026</a:t>
+              <a:t>3 June 2026</a:t>
             </a:fld>
             <a:endParaRPr lang="en-US"/>
           </a:p>
@@ -16162,7 +16276,7 @@
           <a:p>
             <a:fld id="{FF31E861-D2AF-431D-860B-DCF67C218052}" type="datetime3">
               <a:rPr lang="en-US" smtClean="0"/>
-              <a:t>2 June 2026</a:t>
+              <a:t>3 June 2026</a:t>
             </a:fld>
             <a:endParaRPr lang="en-US"/>
           </a:p>
@@ -16441,7 +16555,7 @@
           <a:p>
             <a:fld id="{D1DA25B2-AAF1-4C1F-AA38-12D5BFA7D4C8}" type="datetime3">
               <a:rPr lang="en-US" smtClean="0"/>
-              <a:t>2 June 2026</a:t>
+              <a:t>3 June 2026</a:t>
             </a:fld>
             <a:endParaRPr lang="en-US"/>
           </a:p>
@@ -16720,7 +16834,7 @@
           <a:p>
             <a:fld id="{A25C0F39-45D0-48E9-90B3-7FE8FCE561C8}" type="datetime3">
               <a:rPr lang="en-US" smtClean="0"/>
-              <a:t>2 June 2026</a:t>
+              <a:t>3 June 2026</a:t>
             </a:fld>
             <a:endParaRPr lang="en-US"/>
           </a:p>
@@ -17221,7 +17335,7 @@
           <a:p>
             <a:fld id="{9BAF1A3D-92FA-4F24-9781-74AFA516A230}" type="datetime3">
               <a:rPr lang="en-US" smtClean="0"/>
-              <a:t>2 June 2026</a:t>
+              <a:t>3 June 2026</a:t>
             </a:fld>
             <a:endParaRPr lang="en-US"/>
           </a:p>
@@ -17348,7 +17462,7 @@
           <a:p>
             <a:fld id="{5719C672-856D-4617-A693-8FE15749A9B7}" type="datetime3">
               <a:rPr lang="en-US" smtClean="0"/>
-              <a:t>2 June 2026</a:t>
+              <a:t>3 June 2026</a:t>
             </a:fld>
             <a:endParaRPr lang="en-US"/>
           </a:p>
@@ -17483,7 +17597,7 @@
           <a:p>
             <a:fld id="{5F6C764D-A39E-4C03-B161-E0BC66E8883B}" type="datetime3">
               <a:rPr lang="en-US" smtClean="0"/>
-              <a:t>2 June 2026</a:t>
+              <a:t>3 June 2026</a:t>
             </a:fld>
             <a:endParaRPr lang="en-US"/>
           </a:p>
@@ -17725,7 +17839,7 @@
           <a:p>
             <a:fld id="{6E3E33F9-20B7-4995-BE7D-165DBB597850}" type="datetime3">
               <a:rPr lang="en-US" smtClean="0"/>
-              <a:t>2 June 2026</a:t>
+              <a:t>3 June 2026</a:t>
             </a:fld>
             <a:endParaRPr lang="en-US"/>
           </a:p>
@@ -17838,7 +17952,7 @@
           <a:p>
             <a:fld id="{CD41C263-3501-4369-A962-62B6BF915CDE}" type="datetime3">
               <a:rPr lang="en-US" smtClean="0"/>
-              <a:t>2 June 2026</a:t>
+              <a:t>3 June 2026</a:t>
             </a:fld>
             <a:endParaRPr lang="en-US"/>
           </a:p>
@@ -18241,7 +18355,7 @@
           <a:p>
             <a:fld id="{B06F3EBE-B2E8-4992-9F00-9E4B44F057C0}" type="datetime3">
               <a:rPr lang="en-US" smtClean="0"/>
-              <a:t>2 June 2026</a:t>
+              <a:t>3 June 2026</a:t>
             </a:fld>
             <a:endParaRPr lang="en-US"/>
           </a:p>
@@ -18373,7 +18487,7 @@
           <a:p>
             <a:fld id="{D41656AB-D2E1-472E-8B95-0DF5C6E1D623}" type="datetime3">
               <a:rPr lang="en-US" smtClean="0"/>
-              <a:t>2 June 2026</a:t>
+              <a:t>3 June 2026</a:t>
             </a:fld>
             <a:endParaRPr lang="en-US"/>
           </a:p>
@@ -22514,7 +22628,7 @@
           <a:p>
             <a:fld id="{AD622D1A-DF83-41A8-85FF-04D90BF831D3}" type="datetime3">
               <a:rPr lang="en-US" smtClean="0"/>
-              <a:t>2 June 2026</a:t>
+              <a:t>3 June 2026</a:t>
             </a:fld>
             <a:endParaRPr lang="en-US"/>
           </a:p>
@@ -22764,7 +22878,7 @@
           <a:p>
             <a:fld id="{334F72C3-CDF3-44A8-B602-1649B1728485}" type="datetime3">
               <a:rPr lang="en-US" smtClean="0"/>
-              <a:t>2 June 2026</a:t>
+              <a:t>3 June 2026</a:t>
             </a:fld>
             <a:endParaRPr lang="en-US"/>
           </a:p>
@@ -23071,7 +23185,7 @@
           <a:p>
             <a:fld id="{1E0132BA-B5E7-4FFD-AF6C-169169D47D4A}" type="datetime3">
               <a:rPr lang="en-US" smtClean="0"/>
-              <a:t>2 June 2026</a:t>
+              <a:t>3 June 2026</a:t>
             </a:fld>
             <a:endParaRPr lang="en-US"/>
           </a:p>
@@ -23552,7 +23666,7 @@
           <a:p>
             <a:fld id="{81A30091-1C2A-4151-8D3C-D1E47A72615F}" type="datetime3">
               <a:rPr lang="en-US" smtClean="0"/>
-              <a:t>2 June 2026</a:t>
+              <a:t>3 June 2026</a:t>
             </a:fld>
             <a:endParaRPr lang="en-US"/>
           </a:p>
@@ -24189,7 +24303,7 @@
           <a:p>
             <a:fld id="{35D703CE-07B4-4C05-A488-B4566700621F}" type="datetime3">
               <a:rPr lang="en-US" smtClean="0"/>
-              <a:t>2 June 2026</a:t>
+              <a:t>3 June 2026</a:t>
             </a:fld>
             <a:endParaRPr lang="en-US"/>
           </a:p>
@@ -25247,7 +25361,7 @@
           <a:p>
             <a:fld id="{694BD61C-20BA-43AF-A21F-1DAFB3200099}" type="datetime3">
               <a:rPr lang="en-US" smtClean="0"/>
-              <a:t>2 June 2026</a:t>
+              <a:t>3 June 2026</a:t>
             </a:fld>
             <a:endParaRPr lang="en-US"/>
           </a:p>
@@ -25734,7 +25848,7 @@
           <a:p>
             <a:fld id="{CABCB1B0-B6E5-4DD1-BB55-95C076D6C0C8}" type="datetime3">
               <a:rPr lang="en-US" smtClean="0"/>
-              <a:t>2 June 2026</a:t>
+              <a:t>3 June 2026</a:t>
             </a:fld>
             <a:endParaRPr lang="en-US"/>
           </a:p>
@@ -26678,6 +26792,448 @@
 </file>
 
 <file path=ppt/slides/slide10.xml><?xml version="1.0" encoding="utf-8"?>
+<p:sld xmlns:a="http://schemas.openxmlformats.org/drawingml/2006/main" xmlns:r="http://schemas.openxmlformats.org/officeDocument/2006/relationships" xmlns:p="http://schemas.openxmlformats.org/presentationml/2006/main">
+  <p:cSld>
+    <p:spTree>
+      <p:nvGrpSpPr>
+        <p:cNvPr id="1" name="Shape 311"/>
+        <p:cNvGrpSpPr/>
+        <p:nvPr/>
+      </p:nvGrpSpPr>
+      <p:grpSpPr>
+        <a:xfrm>
+          <a:off x="0" y="0"/>
+          <a:ext cx="0" cy="0"/>
+          <a:chOff x="0" y="0"/>
+          <a:chExt cx="0" cy="0"/>
+        </a:xfrm>
+      </p:grpSpPr>
+      <p:sp>
+        <p:nvSpPr>
+          <p:cNvPr id="312" name="Google Shape;312;p54"/>
+          <p:cNvSpPr txBox="1">
+            <a:spLocks noGrp="1"/>
+          </p:cNvSpPr>
+          <p:nvPr>
+            <p:ph type="title"/>
+          </p:nvPr>
+        </p:nvSpPr>
+        <p:spPr>
+          <a:noFill/>
+          <a:ln>
+            <a:noFill/>
+          </a:ln>
+        </p:spPr>
+        <p:txBody>
+          <a:bodyPr spcFirstLastPara="1" wrap="square" lIns="91425" tIns="45700" rIns="91425" bIns="45700" anchor="ctr" anchorCtr="0">
+            <a:normAutofit/>
+          </a:bodyPr>
+          <a:lstStyle/>
+          <a:p>
+            <a:pPr lvl="0"/>
+            <a:r>
+              <a:rPr lang="en-US"/>
+              <a:t>Data Type Conversion (Casting)</a:t>
+            </a:r>
+          </a:p>
+        </p:txBody>
+      </p:sp>
+      <p:pic>
+        <p:nvPicPr>
+          <p:cNvPr id="8" name="Content Placeholder 7">
+            <a:extLst>
+              <a:ext uri="{FF2B5EF4-FFF2-40B4-BE49-F238E27FC236}">
+                <a16:creationId xmlns:a16="http://schemas.microsoft.com/office/drawing/2014/main" id="{47C5B9A8-13B2-1DF9-516C-B276FB4C4EF2}"/>
+              </a:ext>
+            </a:extLst>
+          </p:cNvPr>
+          <p:cNvPicPr>
+            <a:picLocks noGrp="1" noChangeAspect="1"/>
+          </p:cNvPicPr>
+          <p:nvPr>
+            <p:ph sz="half" idx="1"/>
+          </p:nvPr>
+        </p:nvPicPr>
+        <p:blipFill>
+          <a:blip r:embed="rId3"/>
+          <a:stretch>
+            <a:fillRect/>
+          </a:stretch>
+        </p:blipFill>
+        <p:spPr>
+          <a:xfrm>
+            <a:off x="950196" y="1357428"/>
+            <a:ext cx="2990850" cy="2266950"/>
+          </a:xfrm>
+          <a:prstGeom prst="rect">
+            <a:avLst/>
+          </a:prstGeom>
+          <a:noFill/>
+          <a:ln>
+            <a:noFill/>
+          </a:ln>
+        </p:spPr>
+      </p:pic>
+      <p:sp>
+        <p:nvSpPr>
+          <p:cNvPr id="10" name="Content Placeholder 9">
+            <a:extLst>
+              <a:ext uri="{FF2B5EF4-FFF2-40B4-BE49-F238E27FC236}">
+                <a16:creationId xmlns:a16="http://schemas.microsoft.com/office/drawing/2014/main" id="{CB64C403-3397-DF2F-D446-1511CACE4815}"/>
+              </a:ext>
+            </a:extLst>
+          </p:cNvPr>
+          <p:cNvSpPr>
+            <a:spLocks noGrp="1"/>
+          </p:cNvSpPr>
+          <p:nvPr>
+            <p:ph sz="half" idx="2"/>
+          </p:nvPr>
+        </p:nvSpPr>
+        <p:spPr>
+          <a:xfrm>
+            <a:off x="4434095" y="1405889"/>
+            <a:ext cx="4023360" cy="3429000"/>
+          </a:xfrm>
+        </p:spPr>
+        <p:txBody>
+          <a:bodyPr/>
+          <a:lstStyle/>
+          <a:p>
+            <a:r>
+              <a:rPr lang="en-US" dirty="0"/>
+              <a:t>There are predefined </a:t>
+            </a:r>
+            <a:r>
+              <a:rPr lang="en-US" i="1" dirty="0"/>
+              <a:t>functions </a:t>
+            </a:r>
+            <a:r>
+              <a:rPr lang="en-US" dirty="0"/>
+              <a:t>we can use to </a:t>
+            </a:r>
+            <a:r>
+              <a:rPr lang="en-US" i="1" dirty="0"/>
+              <a:t>explicitly</a:t>
+            </a:r>
+            <a:r>
+              <a:rPr lang="en-US" dirty="0"/>
+              <a:t> convert data from one type to another: </a:t>
+            </a:r>
+          </a:p>
+          <a:p>
+            <a:pPr lvl="1"/>
+            <a:r>
+              <a:rPr lang="en-US" dirty="0"/>
+              <a:t>int()</a:t>
+            </a:r>
+          </a:p>
+          <a:p>
+            <a:pPr lvl="1"/>
+            <a:r>
+              <a:rPr lang="en-US" dirty="0"/>
+              <a:t>float()</a:t>
+            </a:r>
+          </a:p>
+          <a:p>
+            <a:pPr lvl="1"/>
+            <a:r>
+              <a:rPr lang="en-US" dirty="0"/>
+              <a:t>str()</a:t>
+            </a:r>
+          </a:p>
+          <a:p>
+            <a:pPr lvl="1"/>
+            <a:r>
+              <a:rPr lang="en-US" dirty="0"/>
+              <a:t>bool()</a:t>
+            </a:r>
+          </a:p>
+          <a:p>
+            <a:endParaRPr lang="en-US" dirty="0"/>
+          </a:p>
+        </p:txBody>
+      </p:sp>
+    </p:spTree>
+  </p:cSld>
+  <p:clrMapOvr>
+    <a:masterClrMapping/>
+  </p:clrMapOvr>
+  <p:timing>
+    <p:tnLst>
+      <p:par>
+        <p:cTn id="1" dur="indefinite" restart="never" nodeType="tmRoot">
+          <p:childTnLst>
+            <p:seq concurrent="1" nextAc="seek">
+              <p:cTn id="2" dur="indefinite" nodeType="mainSeq">
+                <p:childTnLst>
+                  <p:par>
+                    <p:cTn id="3" fill="hold">
+                      <p:stCondLst>
+                        <p:cond delay="indefinite"/>
+                      </p:stCondLst>
+                      <p:childTnLst>
+                        <p:par>
+                          <p:cTn id="4" fill="hold">
+                            <p:stCondLst>
+                              <p:cond delay="0"/>
+                            </p:stCondLst>
+                            <p:childTnLst>
+                              <p:par>
+                                <p:cTn id="5" presetID="1" presetClass="entr" presetSubtype="0" fill="hold" nodeType="clickEffect">
+                                  <p:stCondLst>
+                                    <p:cond delay="0"/>
+                                  </p:stCondLst>
+                                  <p:childTnLst>
+                                    <p:set>
+                                      <p:cBhvr>
+                                        <p:cTn id="6" dur="1" fill="hold">
+                                          <p:stCondLst>
+                                            <p:cond delay="0"/>
+                                          </p:stCondLst>
+                                        </p:cTn>
+                                        <p:tgtEl>
+                                          <p:spTgt spid="10">
+                                            <p:txEl>
+                                              <p:pRg st="1" end="1"/>
+                                            </p:txEl>
+                                          </p:spTgt>
+                                        </p:tgtEl>
+                                        <p:attrNameLst>
+                                          <p:attrName>style.visibility</p:attrName>
+                                        </p:attrNameLst>
+                                      </p:cBhvr>
+                                      <p:to>
+                                        <p:strVal val="visible"/>
+                                      </p:to>
+                                    </p:set>
+                                  </p:childTnLst>
+                                </p:cTn>
+                              </p:par>
+                            </p:childTnLst>
+                          </p:cTn>
+                        </p:par>
+                      </p:childTnLst>
+                    </p:cTn>
+                  </p:par>
+                  <p:par>
+                    <p:cTn id="7" fill="hold">
+                      <p:stCondLst>
+                        <p:cond delay="indefinite"/>
+                      </p:stCondLst>
+                      <p:childTnLst>
+                        <p:par>
+                          <p:cTn id="8" fill="hold">
+                            <p:stCondLst>
+                              <p:cond delay="0"/>
+                            </p:stCondLst>
+                            <p:childTnLst>
+                              <p:par>
+                                <p:cTn id="9" presetID="1" presetClass="entr" presetSubtype="0" fill="hold" nodeType="clickEffect">
+                                  <p:stCondLst>
+                                    <p:cond delay="0"/>
+                                  </p:stCondLst>
+                                  <p:childTnLst>
+                                    <p:set>
+                                      <p:cBhvr>
+                                        <p:cTn id="10" dur="1" fill="hold">
+                                          <p:stCondLst>
+                                            <p:cond delay="0"/>
+                                          </p:stCondLst>
+                                        </p:cTn>
+                                        <p:tgtEl>
+                                          <p:spTgt spid="10">
+                                            <p:txEl>
+                                              <p:pRg st="2" end="2"/>
+                                            </p:txEl>
+                                          </p:spTgt>
+                                        </p:tgtEl>
+                                        <p:attrNameLst>
+                                          <p:attrName>style.visibility</p:attrName>
+                                        </p:attrNameLst>
+                                      </p:cBhvr>
+                                      <p:to>
+                                        <p:strVal val="visible"/>
+                                      </p:to>
+                                    </p:set>
+                                  </p:childTnLst>
+                                </p:cTn>
+                              </p:par>
+                            </p:childTnLst>
+                          </p:cTn>
+                        </p:par>
+                      </p:childTnLst>
+                    </p:cTn>
+                  </p:par>
+                  <p:par>
+                    <p:cTn id="11" fill="hold">
+                      <p:stCondLst>
+                        <p:cond delay="indefinite"/>
+                      </p:stCondLst>
+                      <p:childTnLst>
+                        <p:par>
+                          <p:cTn id="12" fill="hold">
+                            <p:stCondLst>
+                              <p:cond delay="0"/>
+                            </p:stCondLst>
+                            <p:childTnLst>
+                              <p:par>
+                                <p:cTn id="13" presetID="1" presetClass="entr" presetSubtype="0" fill="hold" nodeType="clickEffect">
+                                  <p:stCondLst>
+                                    <p:cond delay="0"/>
+                                  </p:stCondLst>
+                                  <p:childTnLst>
+                                    <p:set>
+                                      <p:cBhvr>
+                                        <p:cTn id="14" dur="1" fill="hold">
+                                          <p:stCondLst>
+                                            <p:cond delay="0"/>
+                                          </p:stCondLst>
+                                        </p:cTn>
+                                        <p:tgtEl>
+                                          <p:spTgt spid="10">
+                                            <p:txEl>
+                                              <p:pRg st="3" end="3"/>
+                                            </p:txEl>
+                                          </p:spTgt>
+                                        </p:tgtEl>
+                                        <p:attrNameLst>
+                                          <p:attrName>style.visibility</p:attrName>
+                                        </p:attrNameLst>
+                                      </p:cBhvr>
+                                      <p:to>
+                                        <p:strVal val="visible"/>
+                                      </p:to>
+                                    </p:set>
+                                  </p:childTnLst>
+                                </p:cTn>
+                              </p:par>
+                            </p:childTnLst>
+                          </p:cTn>
+                        </p:par>
+                      </p:childTnLst>
+                    </p:cTn>
+                  </p:par>
+                  <p:par>
+                    <p:cTn id="15" fill="hold">
+                      <p:stCondLst>
+                        <p:cond delay="indefinite"/>
+                      </p:stCondLst>
+                      <p:childTnLst>
+                        <p:par>
+                          <p:cTn id="16" fill="hold">
+                            <p:stCondLst>
+                              <p:cond delay="0"/>
+                            </p:stCondLst>
+                            <p:childTnLst>
+                              <p:par>
+                                <p:cTn id="17" presetID="1" presetClass="entr" presetSubtype="0" fill="hold" nodeType="clickEffect">
+                                  <p:stCondLst>
+                                    <p:cond delay="0"/>
+                                  </p:stCondLst>
+                                  <p:childTnLst>
+                                    <p:set>
+                                      <p:cBhvr>
+                                        <p:cTn id="18" dur="1" fill="hold">
+                                          <p:stCondLst>
+                                            <p:cond delay="0"/>
+                                          </p:stCondLst>
+                                        </p:cTn>
+                                        <p:tgtEl>
+                                          <p:spTgt spid="10">
+                                            <p:txEl>
+                                              <p:pRg st="4" end="4"/>
+                                            </p:txEl>
+                                          </p:spTgt>
+                                        </p:tgtEl>
+                                        <p:attrNameLst>
+                                          <p:attrName>style.visibility</p:attrName>
+                                        </p:attrNameLst>
+                                      </p:cBhvr>
+                                      <p:to>
+                                        <p:strVal val="visible"/>
+                                      </p:to>
+                                    </p:set>
+                                  </p:childTnLst>
+                                </p:cTn>
+                              </p:par>
+                            </p:childTnLst>
+                          </p:cTn>
+                        </p:par>
+                      </p:childTnLst>
+                    </p:cTn>
+                  </p:par>
+                  <p:par>
+                    <p:cTn id="19" fill="hold">
+                      <p:stCondLst>
+                        <p:cond delay="indefinite"/>
+                      </p:stCondLst>
+                      <p:childTnLst>
+                        <p:par>
+                          <p:cTn id="20" fill="hold">
+                            <p:stCondLst>
+                              <p:cond delay="0"/>
+                            </p:stCondLst>
+                            <p:childTnLst>
+                              <p:par>
+                                <p:cTn id="21" presetID="1" presetClass="entr" presetSubtype="0" fill="hold" nodeType="clickEffect">
+                                  <p:stCondLst>
+                                    <p:cond delay="0"/>
+                                  </p:stCondLst>
+                                  <p:childTnLst>
+                                    <p:set>
+                                      <p:cBhvr>
+                                        <p:cTn id="22" dur="1" fill="hold">
+                                          <p:stCondLst>
+                                            <p:cond delay="0"/>
+                                          </p:stCondLst>
+                                        </p:cTn>
+                                        <p:tgtEl>
+                                          <p:spTgt spid="8"/>
+                                        </p:tgtEl>
+                                        <p:attrNameLst>
+                                          <p:attrName>style.visibility</p:attrName>
+                                        </p:attrNameLst>
+                                      </p:cBhvr>
+                                      <p:to>
+                                        <p:strVal val="visible"/>
+                                      </p:to>
+                                    </p:set>
+                                  </p:childTnLst>
+                                </p:cTn>
+                              </p:par>
+                            </p:childTnLst>
+                          </p:cTn>
+                        </p:par>
+                      </p:childTnLst>
+                    </p:cTn>
+                  </p:par>
+                </p:childTnLst>
+              </p:cTn>
+              <p:prevCondLst>
+                <p:cond evt="onPrev" delay="0">
+                  <p:tgtEl>
+                    <p:sldTgt/>
+                  </p:tgtEl>
+                </p:cond>
+              </p:prevCondLst>
+              <p:nextCondLst>
+                <p:cond evt="onNext" delay="0">
+                  <p:tgtEl>
+                    <p:sldTgt/>
+                  </p:tgtEl>
+                </p:cond>
+              </p:nextCondLst>
+            </p:seq>
+          </p:childTnLst>
+        </p:cTn>
+      </p:par>
+    </p:tnLst>
+  </p:timing>
+</p:sld>
+</file>
+
+<file path=ppt/slides/slide11.xml><?xml version="1.0" encoding="utf-8"?>
 <p:sld xmlns:a="http://schemas.openxmlformats.org/drawingml/2006/main" xmlns:r="http://schemas.openxmlformats.org/officeDocument/2006/relationships" xmlns:p="http://schemas.openxmlformats.org/presentationml/2006/main">
   <p:cSld>
     <p:spTree>
@@ -28244,7 +28800,7 @@
 </p:sld>
 </file>
 
-<file path=ppt/slides/slide11.xml><?xml version="1.0" encoding="utf-8"?>
+<file path=ppt/slides/slide12.xml><?xml version="1.0" encoding="utf-8"?>
 <p:sld xmlns:a="http://schemas.openxmlformats.org/drawingml/2006/main" xmlns:r="http://schemas.openxmlformats.org/officeDocument/2006/relationships" xmlns:p="http://schemas.openxmlformats.org/presentationml/2006/main">
   <p:cSld>
     <p:spTree>
@@ -29831,7 +30387,7 @@
 </p:sld>
 </file>
 
-<file path=ppt/slides/slide12.xml><?xml version="1.0" encoding="utf-8"?>
+<file path=ppt/slides/slide13.xml><?xml version="1.0" encoding="utf-8"?>
 <p:sld xmlns:a="http://schemas.openxmlformats.org/drawingml/2006/main" xmlns:r="http://schemas.openxmlformats.org/officeDocument/2006/relationships" xmlns:p="http://schemas.openxmlformats.org/presentationml/2006/main">
   <p:cSld>
     <p:spTree>
@@ -31729,7 +32285,7 @@
 </p:sld>
 </file>
 
-<file path=ppt/slides/slide13.xml><?xml version="1.0" encoding="utf-8"?>
+<file path=ppt/slides/slide14.xml><?xml version="1.0" encoding="utf-8"?>
 <p:sld xmlns:a="http://schemas.openxmlformats.org/drawingml/2006/main" xmlns:r="http://schemas.openxmlformats.org/officeDocument/2006/relationships" xmlns:p="http://schemas.openxmlformats.org/presentationml/2006/main">
   <p:cSld>
     <p:spTree>
@@ -32857,7 +33413,7 @@
 </p:sld>
 </file>
 
-<file path=ppt/slides/slide14.xml><?xml version="1.0" encoding="utf-8"?>
+<file path=ppt/slides/slide15.xml><?xml version="1.0" encoding="utf-8"?>
 <p:sld xmlns:a="http://schemas.openxmlformats.org/drawingml/2006/main" xmlns:r="http://schemas.openxmlformats.org/officeDocument/2006/relationships" xmlns:p="http://schemas.openxmlformats.org/presentationml/2006/main">
   <p:cSld>
     <p:spTree>
@@ -33192,7 +33748,7 @@
 </p:sld>
 </file>
 
-<file path=ppt/slides/slide15.xml><?xml version="1.0" encoding="utf-8"?>
+<file path=ppt/slides/slide16.xml><?xml version="1.0" encoding="utf-8"?>
 <p:sld xmlns:a="http://schemas.openxmlformats.org/drawingml/2006/main" xmlns:r="http://schemas.openxmlformats.org/officeDocument/2006/relationships" xmlns:p="http://schemas.openxmlformats.org/presentationml/2006/main">
   <p:cSld>
     <p:spTree>
@@ -33267,7 +33823,7 @@
           <a:p>
             <a:fld id="{334F72C3-CDF3-44A8-B602-1649B1728485}" type="datetime3">
               <a:rPr lang="en-US" smtClean="0"/>
-              <a:t>2 June 2026</a:t>
+              <a:t>3 June 2026</a:t>
             </a:fld>
             <a:endParaRPr lang="en-US"/>
           </a:p>
@@ -33297,7 +33853,7 @@
             <a:fld id="{64E5BE4B-2FBF-4174-9E62-85FAD1CB43A6}" type="slidenum">
               <a:rPr lang="en-US" smtClean="0"/>
               <a:pPr/>
-              <a:t>15</a:t>
+              <a:t>16</a:t>
             </a:fld>
             <a:endParaRPr lang="en-US"/>
           </a:p>
@@ -33316,7 +33872,7 @@
 </p:sld>
 </file>
 
-<file path=ppt/slides/slide16.xml><?xml version="1.0" encoding="utf-8"?>
+<file path=ppt/slides/slide17.xml><?xml version="1.0" encoding="utf-8"?>
 <p:sld xmlns:a="http://schemas.openxmlformats.org/drawingml/2006/main" xmlns:r="http://schemas.openxmlformats.org/officeDocument/2006/relationships" xmlns:p="http://schemas.openxmlformats.org/presentationml/2006/main">
   <p:cSld>
     <p:spTree>
@@ -33449,7 +34005,7 @@
           <a:p>
             <a:fld id="{AD622D1A-DF83-41A8-85FF-04D90BF831D3}" type="datetime3">
               <a:rPr lang="en-US" smtClean="0"/>
-              <a:t>2 June 2026</a:t>
+              <a:t>3 June 2026</a:t>
             </a:fld>
             <a:endParaRPr lang="en-US"/>
           </a:p>
@@ -33479,7 +34035,7 @@
             <a:fld id="{64E5BE4B-2FBF-4174-9E62-85FAD1CB43A6}" type="slidenum">
               <a:rPr lang="en-US" smtClean="0"/>
               <a:pPr/>
-              <a:t>16</a:t>
+              <a:t>17</a:t>
             </a:fld>
             <a:endParaRPr lang="en-US"/>
           </a:p>
@@ -34634,7 +35190,7 @@
 </p:sld>
 </file>
 
-<file path=ppt/slides/slide17.xml><?xml version="1.0" encoding="utf-8"?>
+<file path=ppt/slides/slide18.xml><?xml version="1.0" encoding="utf-8"?>
 <p:sld xmlns:a="http://schemas.openxmlformats.org/drawingml/2006/main" xmlns:r="http://schemas.openxmlformats.org/officeDocument/2006/relationships" xmlns:p="http://schemas.openxmlformats.org/presentationml/2006/main">
   <p:cSld>
     <p:spTree>
@@ -34784,7 +35340,7 @@
           <a:p>
             <a:fld id="{AD622D1A-DF83-41A8-85FF-04D90BF831D3}" type="datetime3">
               <a:rPr lang="en-US" smtClean="0"/>
-              <a:t>2 June 2026</a:t>
+              <a:t>3 June 2026</a:t>
             </a:fld>
             <a:endParaRPr lang="en-US"/>
           </a:p>
@@ -34814,7 +35370,7 @@
             <a:fld id="{64E5BE4B-2FBF-4174-9E62-85FAD1CB43A6}" type="slidenum">
               <a:rPr lang="en-US" smtClean="0"/>
               <a:pPr/>
-              <a:t>17</a:t>
+              <a:t>18</a:t>
             </a:fld>
             <a:endParaRPr lang="en-US"/>
           </a:p>
@@ -35140,7 +35696,7 @@
 </p:sld>
 </file>
 
-<file path=ppt/slides/slide18.xml><?xml version="1.0" encoding="utf-8"?>
+<file path=ppt/slides/slide19.xml><?xml version="1.0" encoding="utf-8"?>
 <p:sld xmlns:a="http://schemas.openxmlformats.org/drawingml/2006/main" xmlns:r="http://schemas.openxmlformats.org/officeDocument/2006/relationships" xmlns:p="http://schemas.openxmlformats.org/presentationml/2006/main">
   <p:cSld>
     <p:spTree>
@@ -35702,728 +36258,6 @@
 </p:sld>
 </file>
 
-<file path=ppt/slides/slide19.xml><?xml version="1.0" encoding="utf-8"?>
-<p:sld xmlns:a="http://schemas.openxmlformats.org/drawingml/2006/main" xmlns:r="http://schemas.openxmlformats.org/officeDocument/2006/relationships" xmlns:p="http://schemas.openxmlformats.org/presentationml/2006/main">
-  <p:cSld>
-    <p:spTree>
-      <p:nvGrpSpPr>
-        <p:cNvPr id="1" name="Shape 330">
-          <a:extLst>
-            <a:ext uri="{FF2B5EF4-FFF2-40B4-BE49-F238E27FC236}">
-              <a16:creationId xmlns:a16="http://schemas.microsoft.com/office/drawing/2014/main" id="{73662F86-93D2-EC03-4783-F9AF1A4BD875}"/>
-            </a:ext>
-          </a:extLst>
-        </p:cNvPr>
-        <p:cNvGrpSpPr/>
-        <p:nvPr/>
-      </p:nvGrpSpPr>
-      <p:grpSpPr>
-        <a:xfrm>
-          <a:off x="0" y="0"/>
-          <a:ext cx="0" cy="0"/>
-          <a:chOff x="0" y="0"/>
-          <a:chExt cx="0" cy="0"/>
-        </a:xfrm>
-      </p:grpSpPr>
-      <p:sp>
-        <p:nvSpPr>
-          <p:cNvPr id="331" name="Google Shape;331;p57">
-            <a:extLst>
-              <a:ext uri="{FF2B5EF4-FFF2-40B4-BE49-F238E27FC236}">
-                <a16:creationId xmlns:a16="http://schemas.microsoft.com/office/drawing/2014/main" id="{065BDC3D-7D5B-84C2-1EBA-ACEA777743E7}"/>
-              </a:ext>
-            </a:extLst>
-          </p:cNvPr>
-          <p:cNvSpPr txBox="1">
-            <a:spLocks noGrp="1"/>
-          </p:cNvSpPr>
-          <p:nvPr>
-            <p:ph type="title"/>
-          </p:nvPr>
-        </p:nvSpPr>
-        <p:spPr>
-          <a:noFill/>
-          <a:ln>
-            <a:noFill/>
-          </a:ln>
-        </p:spPr>
-        <p:txBody>
-          <a:bodyPr spcFirstLastPara="1" wrap="square" lIns="91425" tIns="45700" rIns="91425" bIns="45700" anchor="ctr" anchorCtr="0">
-            <a:normAutofit fontScale="90000"/>
-          </a:bodyPr>
-          <a:lstStyle/>
-          <a:p>
-            <a:pPr lvl="0"/>
-            <a:r>
-              <a:rPr lang="en-US" dirty="0"/>
-              <a:t>Variable Naming Rules and Conventions</a:t>
-            </a:r>
-          </a:p>
-        </p:txBody>
-      </p:sp>
-      <p:graphicFrame>
-        <p:nvGraphicFramePr>
-          <p:cNvPr id="5" name="Table 4">
-            <a:extLst>
-              <a:ext uri="{FF2B5EF4-FFF2-40B4-BE49-F238E27FC236}">
-                <a16:creationId xmlns:a16="http://schemas.microsoft.com/office/drawing/2014/main" id="{F16EAFC3-A0FB-3981-9A92-C75E70A08A03}"/>
-              </a:ext>
-            </a:extLst>
-          </p:cNvPr>
-          <p:cNvGraphicFramePr>
-            <a:graphicFrameLocks noGrp="1"/>
-          </p:cNvGraphicFramePr>
-          <p:nvPr>
-            <p:extLst>
-              <p:ext uri="{D42A27DB-BD31-4B8C-83A1-F6EECF244321}">
-                <p14:modId xmlns:p14="http://schemas.microsoft.com/office/powerpoint/2010/main" val="1170806845"/>
-              </p:ext>
-            </p:extLst>
-          </p:nvPr>
-        </p:nvGraphicFramePr>
-        <p:xfrm>
-          <a:off x="551493" y="1177846"/>
-          <a:ext cx="7860308" cy="2787807"/>
-        </p:xfrm>
-        <a:graphic>
-          <a:graphicData uri="http://schemas.openxmlformats.org/drawingml/2006/table">
-            <a:tbl>
-              <a:tblPr firstRow="1" bandRow="1">
-                <a:tableStyleId>{20BDE71D-A5DA-4731-8206-4FC7E790C503}</a:tableStyleId>
-              </a:tblPr>
-              <a:tblGrid>
-                <a:gridCol w="3930154">
-                  <a:extLst>
-                    <a:ext uri="{9D8B030D-6E8A-4147-A177-3AD203B41FA5}">
-                      <a16:colId xmlns:a16="http://schemas.microsoft.com/office/drawing/2014/main" val="3084290269"/>
-                    </a:ext>
-                  </a:extLst>
-                </a:gridCol>
-                <a:gridCol w="3930154">
-                  <a:extLst>
-                    <a:ext uri="{9D8B030D-6E8A-4147-A177-3AD203B41FA5}">
-                      <a16:colId xmlns:a16="http://schemas.microsoft.com/office/drawing/2014/main" val="781559157"/>
-                    </a:ext>
-                  </a:extLst>
-                </a:gridCol>
-              </a:tblGrid>
-              <a:tr h="483427">
-                <a:tc>
-                  <a:txBody>
-                    <a:bodyPr/>
-                    <a:lstStyle/>
-                    <a:p>
-                      <a:r>
-                        <a:rPr lang="en-US" dirty="0"/>
-                        <a:t>Variable Assignment</a:t>
-                      </a:r>
-                    </a:p>
-                  </a:txBody>
-                  <a:tcPr/>
-                </a:tc>
-                <a:tc>
-                  <a:txBody>
-                    <a:bodyPr/>
-                    <a:lstStyle/>
-                    <a:p>
-                      <a:r>
-                        <a:rPr lang="en-US" dirty="0"/>
-                        <a:t>Is Allowed?</a:t>
-                      </a:r>
-                    </a:p>
-                  </a:txBody>
-                  <a:tcPr/>
-                </a:tc>
-                <a:extLst>
-                  <a:ext uri="{0D108BD9-81ED-4DB2-BD59-A6C34878D82A}">
-                    <a16:rowId xmlns:a16="http://schemas.microsoft.com/office/drawing/2014/main" val="2745091085"/>
-                  </a:ext>
-                </a:extLst>
-              </a:tr>
-              <a:tr h="460876">
-                <a:tc>
-                  <a:txBody>
-                    <a:bodyPr/>
-                    <a:lstStyle/>
-                    <a:p>
-                      <a:r>
-                        <a:rPr lang="en-US" dirty="0" err="1"/>
-                        <a:t>magic_number</a:t>
-                      </a:r>
-                      <a:r>
-                        <a:rPr lang="en-US" dirty="0"/>
-                        <a:t> = 10</a:t>
-                      </a:r>
-                    </a:p>
-                  </a:txBody>
-                  <a:tcPr/>
-                </a:tc>
-                <a:tc>
-                  <a:txBody>
-                    <a:bodyPr/>
-                    <a:lstStyle/>
-                    <a:p>
-                      <a:endParaRPr lang="en-US" dirty="0"/>
-                    </a:p>
-                  </a:txBody>
-                  <a:tcPr/>
-                </a:tc>
-                <a:extLst>
-                  <a:ext uri="{0D108BD9-81ED-4DB2-BD59-A6C34878D82A}">
-                    <a16:rowId xmlns:a16="http://schemas.microsoft.com/office/drawing/2014/main" val="3197588135"/>
-                  </a:ext>
-                </a:extLst>
-              </a:tr>
-              <a:tr h="460876">
-                <a:tc>
-                  <a:txBody>
-                    <a:bodyPr/>
-                    <a:lstStyle/>
-                    <a:p>
-                      <a:r>
-                        <a:rPr lang="en-US" dirty="0" err="1"/>
-                        <a:t>aReallyLongButOkayVariable</a:t>
-                      </a:r>
-                      <a:r>
-                        <a:rPr lang="en-US" dirty="0"/>
-                        <a:t> = “Acceptable?”</a:t>
-                      </a:r>
-                    </a:p>
-                  </a:txBody>
-                  <a:tcPr/>
-                </a:tc>
-                <a:tc>
-                  <a:txBody>
-                    <a:bodyPr/>
-                    <a:lstStyle/>
-                    <a:p>
-                      <a:endParaRPr lang="en-US" dirty="0"/>
-                    </a:p>
-                  </a:txBody>
-                  <a:tcPr/>
-                </a:tc>
-                <a:extLst>
-                  <a:ext uri="{0D108BD9-81ED-4DB2-BD59-A6C34878D82A}">
-                    <a16:rowId xmlns:a16="http://schemas.microsoft.com/office/drawing/2014/main" val="2237801560"/>
-                  </a:ext>
-                </a:extLst>
-              </a:tr>
-              <a:tr h="460876">
-                <a:tc>
-                  <a:txBody>
-                    <a:bodyPr/>
-                    <a:lstStyle/>
-                    <a:p>
-                      <a:r>
-                        <a:rPr lang="en-US" dirty="0"/>
-                        <a:t>123Pianos = 123</a:t>
-                      </a:r>
-                    </a:p>
-                  </a:txBody>
-                  <a:tcPr/>
-                </a:tc>
-                <a:tc>
-                  <a:txBody>
-                    <a:bodyPr/>
-                    <a:lstStyle/>
-                    <a:p>
-                      <a:endParaRPr lang="en-US"/>
-                    </a:p>
-                  </a:txBody>
-                  <a:tcPr/>
-                </a:tc>
-                <a:extLst>
-                  <a:ext uri="{0D108BD9-81ED-4DB2-BD59-A6C34878D82A}">
-                    <a16:rowId xmlns:a16="http://schemas.microsoft.com/office/drawing/2014/main" val="3688382848"/>
-                  </a:ext>
-                </a:extLst>
-              </a:tr>
-              <a:tr h="460876">
-                <a:tc>
-                  <a:txBody>
-                    <a:bodyPr/>
-                    <a:lstStyle/>
-                    <a:p>
-                      <a:r>
-                        <a:rPr lang="en-US" dirty="0"/>
-                        <a:t>for = 25</a:t>
-                      </a:r>
-                    </a:p>
-                  </a:txBody>
-                  <a:tcPr/>
-                </a:tc>
-                <a:tc>
-                  <a:txBody>
-                    <a:bodyPr/>
-                    <a:lstStyle/>
-                    <a:p>
-                      <a:endParaRPr lang="en-US" dirty="0"/>
-                    </a:p>
-                  </a:txBody>
-                  <a:tcPr/>
-                </a:tc>
-                <a:extLst>
-                  <a:ext uri="{0D108BD9-81ED-4DB2-BD59-A6C34878D82A}">
-                    <a16:rowId xmlns:a16="http://schemas.microsoft.com/office/drawing/2014/main" val="2591185080"/>
-                  </a:ext>
-                </a:extLst>
-              </a:tr>
-              <a:tr h="460876">
-                <a:tc>
-                  <a:txBody>
-                    <a:bodyPr/>
-                    <a:lstStyle/>
-                    <a:p>
-                      <a:r>
-                        <a:rPr lang="en-US" dirty="0"/>
-                        <a:t>print = 100</a:t>
-                      </a:r>
-                    </a:p>
-                  </a:txBody>
-                  <a:tcPr/>
-                </a:tc>
-                <a:tc>
-                  <a:txBody>
-                    <a:bodyPr/>
-                    <a:lstStyle/>
-                    <a:p>
-                      <a:endParaRPr lang="en-US" dirty="0"/>
-                    </a:p>
-                  </a:txBody>
-                  <a:tcPr/>
-                </a:tc>
-                <a:extLst>
-                  <a:ext uri="{0D108BD9-81ED-4DB2-BD59-A6C34878D82A}">
-                    <a16:rowId xmlns:a16="http://schemas.microsoft.com/office/drawing/2014/main" val="822269058"/>
-                  </a:ext>
-                </a:extLst>
-              </a:tr>
-            </a:tbl>
-          </a:graphicData>
-        </a:graphic>
-      </p:graphicFrame>
-      <p:sp>
-        <p:nvSpPr>
-          <p:cNvPr id="6" name="TextBox 5">
-            <a:extLst>
-              <a:ext uri="{FF2B5EF4-FFF2-40B4-BE49-F238E27FC236}">
-                <a16:creationId xmlns:a16="http://schemas.microsoft.com/office/drawing/2014/main" id="{C2C603A6-15F1-DDF3-C6DA-BAE11A2F1C93}"/>
-              </a:ext>
-            </a:extLst>
-          </p:cNvPr>
-          <p:cNvSpPr txBox="1"/>
-          <p:nvPr/>
-        </p:nvSpPr>
-        <p:spPr>
-          <a:xfrm>
-            <a:off x="4481647" y="1727018"/>
-            <a:ext cx="4037885" cy="2246769"/>
-          </a:xfrm>
-          <a:prstGeom prst="rect">
-            <a:avLst/>
-          </a:prstGeom>
-          <a:noFill/>
-        </p:spPr>
-        <p:txBody>
-          <a:bodyPr wrap="square">
-            <a:spAutoFit/>
-          </a:bodyPr>
-          <a:lstStyle/>
-          <a:p>
-            <a:pPr marL="0" indent="0">
-              <a:buNone/>
-            </a:pPr>
-            <a:r>
-              <a:rPr lang="en-US" b="1" dirty="0">
-                <a:solidFill>
-                  <a:srgbClr val="00B050"/>
-                </a:solidFill>
-              </a:rPr>
-              <a:t>Yes</a:t>
-            </a:r>
-          </a:p>
-          <a:p>
-            <a:pPr marL="0" indent="0">
-              <a:buNone/>
-            </a:pPr>
-            <a:endParaRPr lang="en-US" b="1" dirty="0">
-              <a:solidFill>
-                <a:srgbClr val="00B050"/>
-              </a:solidFill>
-            </a:endParaRPr>
-          </a:p>
-          <a:p>
-            <a:pPr marL="0" indent="0">
-              <a:buNone/>
-            </a:pPr>
-            <a:r>
-              <a:rPr lang="en-US" b="1" dirty="0">
-                <a:solidFill>
-                  <a:srgbClr val="00B050"/>
-                </a:solidFill>
-              </a:rPr>
-              <a:t>Yes</a:t>
-            </a:r>
-          </a:p>
-          <a:p>
-            <a:pPr marL="0" indent="0">
-              <a:buNone/>
-            </a:pPr>
-            <a:endParaRPr lang="en-US" b="1" dirty="0">
-              <a:solidFill>
-                <a:srgbClr val="00B050"/>
-              </a:solidFill>
-            </a:endParaRPr>
-          </a:p>
-          <a:p>
-            <a:pPr marL="0" indent="0">
-              <a:buNone/>
-            </a:pPr>
-            <a:r>
-              <a:rPr lang="en-US" b="1" dirty="0">
-                <a:solidFill>
-                  <a:srgbClr val="00B050"/>
-                </a:solidFill>
-              </a:rPr>
-              <a:t>No</a:t>
-            </a:r>
-          </a:p>
-          <a:p>
-            <a:pPr marL="0" indent="0">
-              <a:buNone/>
-            </a:pPr>
-            <a:endParaRPr lang="en-US" b="1" dirty="0">
-              <a:solidFill>
-                <a:srgbClr val="00B050"/>
-              </a:solidFill>
-            </a:endParaRPr>
-          </a:p>
-          <a:p>
-            <a:pPr marL="0" indent="0">
-              <a:buNone/>
-            </a:pPr>
-            <a:r>
-              <a:rPr lang="en-US" b="1" dirty="0">
-                <a:solidFill>
-                  <a:srgbClr val="00B050"/>
-                </a:solidFill>
-              </a:rPr>
-              <a:t>No</a:t>
-            </a:r>
-          </a:p>
-          <a:p>
-            <a:pPr marL="0" indent="0">
-              <a:buNone/>
-            </a:pPr>
-            <a:endParaRPr lang="en-US" b="1" dirty="0">
-              <a:solidFill>
-                <a:srgbClr val="00B050"/>
-              </a:solidFill>
-            </a:endParaRPr>
-          </a:p>
-          <a:p>
-            <a:pPr marL="0" indent="0">
-              <a:buNone/>
-            </a:pPr>
-            <a:r>
-              <a:rPr lang="en-US" b="1" dirty="0">
-                <a:solidFill>
-                  <a:srgbClr val="00B050"/>
-                </a:solidFill>
-              </a:rPr>
-              <a:t>Yes, but you will no longer be able to use the print() function</a:t>
-            </a:r>
-          </a:p>
-        </p:txBody>
-      </p:sp>
-    </p:spTree>
-    <p:extLst>
-      <p:ext uri="{BB962C8B-B14F-4D97-AF65-F5344CB8AC3E}">
-        <p14:creationId xmlns:p14="http://schemas.microsoft.com/office/powerpoint/2010/main" val="2616480698"/>
-      </p:ext>
-    </p:extLst>
-  </p:cSld>
-  <p:clrMapOvr>
-    <a:masterClrMapping/>
-  </p:clrMapOvr>
-  <p:timing>
-    <p:tnLst>
-      <p:par>
-        <p:cTn id="1" dur="indefinite" restart="never" nodeType="tmRoot">
-          <p:childTnLst>
-            <p:seq concurrent="1" nextAc="seek">
-              <p:cTn id="2" dur="indefinite" nodeType="mainSeq">
-                <p:childTnLst>
-                  <p:par>
-                    <p:cTn id="3" fill="hold">
-                      <p:stCondLst>
-                        <p:cond delay="indefinite"/>
-                      </p:stCondLst>
-                      <p:childTnLst>
-                        <p:par>
-                          <p:cTn id="4" fill="hold">
-                            <p:stCondLst>
-                              <p:cond delay="0"/>
-                            </p:stCondLst>
-                            <p:childTnLst>
-                              <p:par>
-                                <p:cTn id="5" presetID="1" presetClass="entr" presetSubtype="0" fill="hold" nodeType="clickEffect">
-                                  <p:stCondLst>
-                                    <p:cond delay="0"/>
-                                  </p:stCondLst>
-                                  <p:childTnLst>
-                                    <p:set>
-                                      <p:cBhvr>
-                                        <p:cTn id="6" dur="1" fill="hold">
-                                          <p:stCondLst>
-                                            <p:cond delay="0"/>
-                                          </p:stCondLst>
-                                        </p:cTn>
-                                        <p:tgtEl>
-                                          <p:spTgt spid="6">
-                                            <p:txEl>
-                                              <p:pRg st="0" end="0"/>
-                                            </p:txEl>
-                                          </p:spTgt>
-                                        </p:tgtEl>
-                                        <p:attrNameLst>
-                                          <p:attrName>style.visibility</p:attrName>
-                                        </p:attrNameLst>
-                                      </p:cBhvr>
-                                      <p:to>
-                                        <p:strVal val="visible"/>
-                                      </p:to>
-                                    </p:set>
-                                  </p:childTnLst>
-                                </p:cTn>
-                              </p:par>
-                            </p:childTnLst>
-                          </p:cTn>
-                        </p:par>
-                      </p:childTnLst>
-                    </p:cTn>
-                  </p:par>
-                  <p:par>
-                    <p:cTn id="7" fill="hold">
-                      <p:stCondLst>
-                        <p:cond delay="indefinite"/>
-                      </p:stCondLst>
-                      <p:childTnLst>
-                        <p:par>
-                          <p:cTn id="8" fill="hold">
-                            <p:stCondLst>
-                              <p:cond delay="0"/>
-                            </p:stCondLst>
-                            <p:childTnLst>
-                              <p:par>
-                                <p:cTn id="9" presetID="1" presetClass="entr" presetSubtype="0" fill="hold" nodeType="clickEffect">
-                                  <p:stCondLst>
-                                    <p:cond delay="0"/>
-                                  </p:stCondLst>
-                                  <p:childTnLst>
-                                    <p:set>
-                                      <p:cBhvr>
-                                        <p:cTn id="10" dur="1" fill="hold">
-                                          <p:stCondLst>
-                                            <p:cond delay="0"/>
-                                          </p:stCondLst>
-                                        </p:cTn>
-                                        <p:tgtEl>
-                                          <p:spTgt spid="6">
-                                            <p:txEl>
-                                              <p:pRg st="2" end="2"/>
-                                            </p:txEl>
-                                          </p:spTgt>
-                                        </p:tgtEl>
-                                        <p:attrNameLst>
-                                          <p:attrName>style.visibility</p:attrName>
-                                        </p:attrNameLst>
-                                      </p:cBhvr>
-                                      <p:to>
-                                        <p:strVal val="visible"/>
-                                      </p:to>
-                                    </p:set>
-                                  </p:childTnLst>
-                                </p:cTn>
-                              </p:par>
-                            </p:childTnLst>
-                          </p:cTn>
-                        </p:par>
-                      </p:childTnLst>
-                    </p:cTn>
-                  </p:par>
-                  <p:par>
-                    <p:cTn id="11" fill="hold">
-                      <p:stCondLst>
-                        <p:cond delay="indefinite"/>
-                      </p:stCondLst>
-                      <p:childTnLst>
-                        <p:par>
-                          <p:cTn id="12" fill="hold">
-                            <p:stCondLst>
-                              <p:cond delay="0"/>
-                            </p:stCondLst>
-                            <p:childTnLst>
-                              <p:par>
-                                <p:cTn id="13" presetID="1" presetClass="entr" presetSubtype="0" fill="hold" nodeType="clickEffect">
-                                  <p:stCondLst>
-                                    <p:cond delay="0"/>
-                                  </p:stCondLst>
-                                  <p:childTnLst>
-                                    <p:set>
-                                      <p:cBhvr>
-                                        <p:cTn id="14" dur="1" fill="hold">
-                                          <p:stCondLst>
-                                            <p:cond delay="0"/>
-                                          </p:stCondLst>
-                                        </p:cTn>
-                                        <p:tgtEl>
-                                          <p:spTgt spid="6">
-                                            <p:txEl>
-                                              <p:pRg st="4" end="4"/>
-                                            </p:txEl>
-                                          </p:spTgt>
-                                        </p:tgtEl>
-                                        <p:attrNameLst>
-                                          <p:attrName>style.visibility</p:attrName>
-                                        </p:attrNameLst>
-                                      </p:cBhvr>
-                                      <p:to>
-                                        <p:strVal val="visible"/>
-                                      </p:to>
-                                    </p:set>
-                                  </p:childTnLst>
-                                </p:cTn>
-                              </p:par>
-                            </p:childTnLst>
-                          </p:cTn>
-                        </p:par>
-                      </p:childTnLst>
-                    </p:cTn>
-                  </p:par>
-                  <p:par>
-                    <p:cTn id="15" fill="hold">
-                      <p:stCondLst>
-                        <p:cond delay="indefinite"/>
-                      </p:stCondLst>
-                      <p:childTnLst>
-                        <p:par>
-                          <p:cTn id="16" fill="hold">
-                            <p:stCondLst>
-                              <p:cond delay="0"/>
-                            </p:stCondLst>
-                            <p:childTnLst>
-                              <p:par>
-                                <p:cTn id="17" presetID="1" presetClass="entr" presetSubtype="0" fill="hold" nodeType="clickEffect">
-                                  <p:stCondLst>
-                                    <p:cond delay="0"/>
-                                  </p:stCondLst>
-                                  <p:childTnLst>
-                                    <p:set>
-                                      <p:cBhvr>
-                                        <p:cTn id="18" dur="1" fill="hold">
-                                          <p:stCondLst>
-                                            <p:cond delay="0"/>
-                                          </p:stCondLst>
-                                        </p:cTn>
-                                        <p:tgtEl>
-                                          <p:spTgt spid="6">
-                                            <p:txEl>
-                                              <p:pRg st="6" end="6"/>
-                                            </p:txEl>
-                                          </p:spTgt>
-                                        </p:tgtEl>
-                                        <p:attrNameLst>
-                                          <p:attrName>style.visibility</p:attrName>
-                                        </p:attrNameLst>
-                                      </p:cBhvr>
-                                      <p:to>
-                                        <p:strVal val="visible"/>
-                                      </p:to>
-                                    </p:set>
-                                  </p:childTnLst>
-                                </p:cTn>
-                              </p:par>
-                            </p:childTnLst>
-                          </p:cTn>
-                        </p:par>
-                      </p:childTnLst>
-                    </p:cTn>
-                  </p:par>
-                  <p:par>
-                    <p:cTn id="19" fill="hold">
-                      <p:stCondLst>
-                        <p:cond delay="indefinite"/>
-                      </p:stCondLst>
-                      <p:childTnLst>
-                        <p:par>
-                          <p:cTn id="20" fill="hold">
-                            <p:stCondLst>
-                              <p:cond delay="0"/>
-                            </p:stCondLst>
-                            <p:childTnLst>
-                              <p:par>
-                                <p:cTn id="21" presetID="1" presetClass="entr" presetSubtype="0" fill="hold" nodeType="clickEffect">
-                                  <p:stCondLst>
-                                    <p:cond delay="0"/>
-                                  </p:stCondLst>
-                                  <p:childTnLst>
-                                    <p:set>
-                                      <p:cBhvr>
-                                        <p:cTn id="22" dur="1" fill="hold">
-                                          <p:stCondLst>
-                                            <p:cond delay="0"/>
-                                          </p:stCondLst>
-                                        </p:cTn>
-                                        <p:tgtEl>
-                                          <p:spTgt spid="6">
-                                            <p:txEl>
-                                              <p:pRg st="8" end="8"/>
-                                            </p:txEl>
-                                          </p:spTgt>
-                                        </p:tgtEl>
-                                        <p:attrNameLst>
-                                          <p:attrName>style.visibility</p:attrName>
-                                        </p:attrNameLst>
-                                      </p:cBhvr>
-                                      <p:to>
-                                        <p:strVal val="visible"/>
-                                      </p:to>
-                                    </p:set>
-                                  </p:childTnLst>
-                                </p:cTn>
-                              </p:par>
-                            </p:childTnLst>
-                          </p:cTn>
-                        </p:par>
-                      </p:childTnLst>
-                    </p:cTn>
-                  </p:par>
-                </p:childTnLst>
-              </p:cTn>
-              <p:prevCondLst>
-                <p:cond evt="onPrev" delay="0">
-                  <p:tgtEl>
-                    <p:sldTgt/>
-                  </p:tgtEl>
-                </p:cond>
-              </p:prevCondLst>
-              <p:nextCondLst>
-                <p:cond evt="onNext" delay="0">
-                  <p:tgtEl>
-                    <p:sldTgt/>
-                  </p:tgtEl>
-                </p:cond>
-              </p:nextCondLst>
-            </p:seq>
-          </p:childTnLst>
-        </p:cTn>
-      </p:par>
-    </p:tnLst>
-  </p:timing>
-</p:sld>
-</file>
-
 <file path=ppt/slides/slide2.xml><?xml version="1.0" encoding="utf-8"?>
 <p:sld xmlns:a="http://schemas.openxmlformats.org/drawingml/2006/main" xmlns:r="http://schemas.openxmlformats.org/officeDocument/2006/relationships" xmlns:p="http://schemas.openxmlformats.org/presentationml/2006/main">
   <p:cSld>
@@ -36879,6 +36713,728 @@
   <p:cSld>
     <p:spTree>
       <p:nvGrpSpPr>
+        <p:cNvPr id="1" name="Shape 330">
+          <a:extLst>
+            <a:ext uri="{FF2B5EF4-FFF2-40B4-BE49-F238E27FC236}">
+              <a16:creationId xmlns:a16="http://schemas.microsoft.com/office/drawing/2014/main" id="{73662F86-93D2-EC03-4783-F9AF1A4BD875}"/>
+            </a:ext>
+          </a:extLst>
+        </p:cNvPr>
+        <p:cNvGrpSpPr/>
+        <p:nvPr/>
+      </p:nvGrpSpPr>
+      <p:grpSpPr>
+        <a:xfrm>
+          <a:off x="0" y="0"/>
+          <a:ext cx="0" cy="0"/>
+          <a:chOff x="0" y="0"/>
+          <a:chExt cx="0" cy="0"/>
+        </a:xfrm>
+      </p:grpSpPr>
+      <p:sp>
+        <p:nvSpPr>
+          <p:cNvPr id="331" name="Google Shape;331;p57">
+            <a:extLst>
+              <a:ext uri="{FF2B5EF4-FFF2-40B4-BE49-F238E27FC236}">
+                <a16:creationId xmlns:a16="http://schemas.microsoft.com/office/drawing/2014/main" id="{065BDC3D-7D5B-84C2-1EBA-ACEA777743E7}"/>
+              </a:ext>
+            </a:extLst>
+          </p:cNvPr>
+          <p:cNvSpPr txBox="1">
+            <a:spLocks noGrp="1"/>
+          </p:cNvSpPr>
+          <p:nvPr>
+            <p:ph type="title"/>
+          </p:nvPr>
+        </p:nvSpPr>
+        <p:spPr>
+          <a:noFill/>
+          <a:ln>
+            <a:noFill/>
+          </a:ln>
+        </p:spPr>
+        <p:txBody>
+          <a:bodyPr spcFirstLastPara="1" wrap="square" lIns="91425" tIns="45700" rIns="91425" bIns="45700" anchor="ctr" anchorCtr="0">
+            <a:normAutofit fontScale="90000"/>
+          </a:bodyPr>
+          <a:lstStyle/>
+          <a:p>
+            <a:pPr lvl="0"/>
+            <a:r>
+              <a:rPr lang="en-US" dirty="0"/>
+              <a:t>Variable Naming Rules and Conventions</a:t>
+            </a:r>
+          </a:p>
+        </p:txBody>
+      </p:sp>
+      <p:graphicFrame>
+        <p:nvGraphicFramePr>
+          <p:cNvPr id="5" name="Table 4">
+            <a:extLst>
+              <a:ext uri="{FF2B5EF4-FFF2-40B4-BE49-F238E27FC236}">
+                <a16:creationId xmlns:a16="http://schemas.microsoft.com/office/drawing/2014/main" id="{F16EAFC3-A0FB-3981-9A92-C75E70A08A03}"/>
+              </a:ext>
+            </a:extLst>
+          </p:cNvPr>
+          <p:cNvGraphicFramePr>
+            <a:graphicFrameLocks noGrp="1"/>
+          </p:cNvGraphicFramePr>
+          <p:nvPr>
+            <p:extLst>
+              <p:ext uri="{D42A27DB-BD31-4B8C-83A1-F6EECF244321}">
+                <p14:modId xmlns:p14="http://schemas.microsoft.com/office/powerpoint/2010/main" val="1170806845"/>
+              </p:ext>
+            </p:extLst>
+          </p:nvPr>
+        </p:nvGraphicFramePr>
+        <p:xfrm>
+          <a:off x="551493" y="1177846"/>
+          <a:ext cx="7860308" cy="2787807"/>
+        </p:xfrm>
+        <a:graphic>
+          <a:graphicData uri="http://schemas.openxmlformats.org/drawingml/2006/table">
+            <a:tbl>
+              <a:tblPr firstRow="1" bandRow="1">
+                <a:tableStyleId>{20BDE71D-A5DA-4731-8206-4FC7E790C503}</a:tableStyleId>
+              </a:tblPr>
+              <a:tblGrid>
+                <a:gridCol w="3930154">
+                  <a:extLst>
+                    <a:ext uri="{9D8B030D-6E8A-4147-A177-3AD203B41FA5}">
+                      <a16:colId xmlns:a16="http://schemas.microsoft.com/office/drawing/2014/main" val="3084290269"/>
+                    </a:ext>
+                  </a:extLst>
+                </a:gridCol>
+                <a:gridCol w="3930154">
+                  <a:extLst>
+                    <a:ext uri="{9D8B030D-6E8A-4147-A177-3AD203B41FA5}">
+                      <a16:colId xmlns:a16="http://schemas.microsoft.com/office/drawing/2014/main" val="781559157"/>
+                    </a:ext>
+                  </a:extLst>
+                </a:gridCol>
+              </a:tblGrid>
+              <a:tr h="483427">
+                <a:tc>
+                  <a:txBody>
+                    <a:bodyPr/>
+                    <a:lstStyle/>
+                    <a:p>
+                      <a:r>
+                        <a:rPr lang="en-US" dirty="0"/>
+                        <a:t>Variable Assignment</a:t>
+                      </a:r>
+                    </a:p>
+                  </a:txBody>
+                  <a:tcPr/>
+                </a:tc>
+                <a:tc>
+                  <a:txBody>
+                    <a:bodyPr/>
+                    <a:lstStyle/>
+                    <a:p>
+                      <a:r>
+                        <a:rPr lang="en-US" dirty="0"/>
+                        <a:t>Is Allowed?</a:t>
+                      </a:r>
+                    </a:p>
+                  </a:txBody>
+                  <a:tcPr/>
+                </a:tc>
+                <a:extLst>
+                  <a:ext uri="{0D108BD9-81ED-4DB2-BD59-A6C34878D82A}">
+                    <a16:rowId xmlns:a16="http://schemas.microsoft.com/office/drawing/2014/main" val="2745091085"/>
+                  </a:ext>
+                </a:extLst>
+              </a:tr>
+              <a:tr h="460876">
+                <a:tc>
+                  <a:txBody>
+                    <a:bodyPr/>
+                    <a:lstStyle/>
+                    <a:p>
+                      <a:r>
+                        <a:rPr lang="en-US" dirty="0" err="1"/>
+                        <a:t>magic_number</a:t>
+                      </a:r>
+                      <a:r>
+                        <a:rPr lang="en-US" dirty="0"/>
+                        <a:t> = 10</a:t>
+                      </a:r>
+                    </a:p>
+                  </a:txBody>
+                  <a:tcPr/>
+                </a:tc>
+                <a:tc>
+                  <a:txBody>
+                    <a:bodyPr/>
+                    <a:lstStyle/>
+                    <a:p>
+                      <a:endParaRPr lang="en-US" dirty="0"/>
+                    </a:p>
+                  </a:txBody>
+                  <a:tcPr/>
+                </a:tc>
+                <a:extLst>
+                  <a:ext uri="{0D108BD9-81ED-4DB2-BD59-A6C34878D82A}">
+                    <a16:rowId xmlns:a16="http://schemas.microsoft.com/office/drawing/2014/main" val="3197588135"/>
+                  </a:ext>
+                </a:extLst>
+              </a:tr>
+              <a:tr h="460876">
+                <a:tc>
+                  <a:txBody>
+                    <a:bodyPr/>
+                    <a:lstStyle/>
+                    <a:p>
+                      <a:r>
+                        <a:rPr lang="en-US" dirty="0" err="1"/>
+                        <a:t>aReallyLongButOkayVariable</a:t>
+                      </a:r>
+                      <a:r>
+                        <a:rPr lang="en-US" dirty="0"/>
+                        <a:t> = “Acceptable?”</a:t>
+                      </a:r>
+                    </a:p>
+                  </a:txBody>
+                  <a:tcPr/>
+                </a:tc>
+                <a:tc>
+                  <a:txBody>
+                    <a:bodyPr/>
+                    <a:lstStyle/>
+                    <a:p>
+                      <a:endParaRPr lang="en-US" dirty="0"/>
+                    </a:p>
+                  </a:txBody>
+                  <a:tcPr/>
+                </a:tc>
+                <a:extLst>
+                  <a:ext uri="{0D108BD9-81ED-4DB2-BD59-A6C34878D82A}">
+                    <a16:rowId xmlns:a16="http://schemas.microsoft.com/office/drawing/2014/main" val="2237801560"/>
+                  </a:ext>
+                </a:extLst>
+              </a:tr>
+              <a:tr h="460876">
+                <a:tc>
+                  <a:txBody>
+                    <a:bodyPr/>
+                    <a:lstStyle/>
+                    <a:p>
+                      <a:r>
+                        <a:rPr lang="en-US" dirty="0"/>
+                        <a:t>123Pianos = 123</a:t>
+                      </a:r>
+                    </a:p>
+                  </a:txBody>
+                  <a:tcPr/>
+                </a:tc>
+                <a:tc>
+                  <a:txBody>
+                    <a:bodyPr/>
+                    <a:lstStyle/>
+                    <a:p>
+                      <a:endParaRPr lang="en-US"/>
+                    </a:p>
+                  </a:txBody>
+                  <a:tcPr/>
+                </a:tc>
+                <a:extLst>
+                  <a:ext uri="{0D108BD9-81ED-4DB2-BD59-A6C34878D82A}">
+                    <a16:rowId xmlns:a16="http://schemas.microsoft.com/office/drawing/2014/main" val="3688382848"/>
+                  </a:ext>
+                </a:extLst>
+              </a:tr>
+              <a:tr h="460876">
+                <a:tc>
+                  <a:txBody>
+                    <a:bodyPr/>
+                    <a:lstStyle/>
+                    <a:p>
+                      <a:r>
+                        <a:rPr lang="en-US" dirty="0"/>
+                        <a:t>for = 25</a:t>
+                      </a:r>
+                    </a:p>
+                  </a:txBody>
+                  <a:tcPr/>
+                </a:tc>
+                <a:tc>
+                  <a:txBody>
+                    <a:bodyPr/>
+                    <a:lstStyle/>
+                    <a:p>
+                      <a:endParaRPr lang="en-US" dirty="0"/>
+                    </a:p>
+                  </a:txBody>
+                  <a:tcPr/>
+                </a:tc>
+                <a:extLst>
+                  <a:ext uri="{0D108BD9-81ED-4DB2-BD59-A6C34878D82A}">
+                    <a16:rowId xmlns:a16="http://schemas.microsoft.com/office/drawing/2014/main" val="2591185080"/>
+                  </a:ext>
+                </a:extLst>
+              </a:tr>
+              <a:tr h="460876">
+                <a:tc>
+                  <a:txBody>
+                    <a:bodyPr/>
+                    <a:lstStyle/>
+                    <a:p>
+                      <a:r>
+                        <a:rPr lang="en-US" dirty="0"/>
+                        <a:t>print = 100</a:t>
+                      </a:r>
+                    </a:p>
+                  </a:txBody>
+                  <a:tcPr/>
+                </a:tc>
+                <a:tc>
+                  <a:txBody>
+                    <a:bodyPr/>
+                    <a:lstStyle/>
+                    <a:p>
+                      <a:endParaRPr lang="en-US" dirty="0"/>
+                    </a:p>
+                  </a:txBody>
+                  <a:tcPr/>
+                </a:tc>
+                <a:extLst>
+                  <a:ext uri="{0D108BD9-81ED-4DB2-BD59-A6C34878D82A}">
+                    <a16:rowId xmlns:a16="http://schemas.microsoft.com/office/drawing/2014/main" val="822269058"/>
+                  </a:ext>
+                </a:extLst>
+              </a:tr>
+            </a:tbl>
+          </a:graphicData>
+        </a:graphic>
+      </p:graphicFrame>
+      <p:sp>
+        <p:nvSpPr>
+          <p:cNvPr id="6" name="TextBox 5">
+            <a:extLst>
+              <a:ext uri="{FF2B5EF4-FFF2-40B4-BE49-F238E27FC236}">
+                <a16:creationId xmlns:a16="http://schemas.microsoft.com/office/drawing/2014/main" id="{C2C603A6-15F1-DDF3-C6DA-BAE11A2F1C93}"/>
+              </a:ext>
+            </a:extLst>
+          </p:cNvPr>
+          <p:cNvSpPr txBox="1"/>
+          <p:nvPr/>
+        </p:nvSpPr>
+        <p:spPr>
+          <a:xfrm>
+            <a:off x="4481647" y="1727018"/>
+            <a:ext cx="4037885" cy="2246769"/>
+          </a:xfrm>
+          <a:prstGeom prst="rect">
+            <a:avLst/>
+          </a:prstGeom>
+          <a:noFill/>
+        </p:spPr>
+        <p:txBody>
+          <a:bodyPr wrap="square">
+            <a:spAutoFit/>
+          </a:bodyPr>
+          <a:lstStyle/>
+          <a:p>
+            <a:pPr marL="0" indent="0">
+              <a:buNone/>
+            </a:pPr>
+            <a:r>
+              <a:rPr lang="en-US" b="1" dirty="0">
+                <a:solidFill>
+                  <a:srgbClr val="00B050"/>
+                </a:solidFill>
+              </a:rPr>
+              <a:t>Yes</a:t>
+            </a:r>
+          </a:p>
+          <a:p>
+            <a:pPr marL="0" indent="0">
+              <a:buNone/>
+            </a:pPr>
+            <a:endParaRPr lang="en-US" b="1" dirty="0">
+              <a:solidFill>
+                <a:srgbClr val="00B050"/>
+              </a:solidFill>
+            </a:endParaRPr>
+          </a:p>
+          <a:p>
+            <a:pPr marL="0" indent="0">
+              <a:buNone/>
+            </a:pPr>
+            <a:r>
+              <a:rPr lang="en-US" b="1" dirty="0">
+                <a:solidFill>
+                  <a:srgbClr val="00B050"/>
+                </a:solidFill>
+              </a:rPr>
+              <a:t>Yes</a:t>
+            </a:r>
+          </a:p>
+          <a:p>
+            <a:pPr marL="0" indent="0">
+              <a:buNone/>
+            </a:pPr>
+            <a:endParaRPr lang="en-US" b="1" dirty="0">
+              <a:solidFill>
+                <a:srgbClr val="00B050"/>
+              </a:solidFill>
+            </a:endParaRPr>
+          </a:p>
+          <a:p>
+            <a:pPr marL="0" indent="0">
+              <a:buNone/>
+            </a:pPr>
+            <a:r>
+              <a:rPr lang="en-US" b="1" dirty="0">
+                <a:solidFill>
+                  <a:srgbClr val="00B050"/>
+                </a:solidFill>
+              </a:rPr>
+              <a:t>No</a:t>
+            </a:r>
+          </a:p>
+          <a:p>
+            <a:pPr marL="0" indent="0">
+              <a:buNone/>
+            </a:pPr>
+            <a:endParaRPr lang="en-US" b="1" dirty="0">
+              <a:solidFill>
+                <a:srgbClr val="00B050"/>
+              </a:solidFill>
+            </a:endParaRPr>
+          </a:p>
+          <a:p>
+            <a:pPr marL="0" indent="0">
+              <a:buNone/>
+            </a:pPr>
+            <a:r>
+              <a:rPr lang="en-US" b="1" dirty="0">
+                <a:solidFill>
+                  <a:srgbClr val="00B050"/>
+                </a:solidFill>
+              </a:rPr>
+              <a:t>No</a:t>
+            </a:r>
+          </a:p>
+          <a:p>
+            <a:pPr marL="0" indent="0">
+              <a:buNone/>
+            </a:pPr>
+            <a:endParaRPr lang="en-US" b="1" dirty="0">
+              <a:solidFill>
+                <a:srgbClr val="00B050"/>
+              </a:solidFill>
+            </a:endParaRPr>
+          </a:p>
+          <a:p>
+            <a:pPr marL="0" indent="0">
+              <a:buNone/>
+            </a:pPr>
+            <a:r>
+              <a:rPr lang="en-US" b="1" dirty="0">
+                <a:solidFill>
+                  <a:srgbClr val="00B050"/>
+                </a:solidFill>
+              </a:rPr>
+              <a:t>Yes, but you will no longer be able to use the print() function</a:t>
+            </a:r>
+          </a:p>
+        </p:txBody>
+      </p:sp>
+    </p:spTree>
+    <p:extLst>
+      <p:ext uri="{BB962C8B-B14F-4D97-AF65-F5344CB8AC3E}">
+        <p14:creationId xmlns:p14="http://schemas.microsoft.com/office/powerpoint/2010/main" val="2616480698"/>
+      </p:ext>
+    </p:extLst>
+  </p:cSld>
+  <p:clrMapOvr>
+    <a:masterClrMapping/>
+  </p:clrMapOvr>
+  <p:timing>
+    <p:tnLst>
+      <p:par>
+        <p:cTn id="1" dur="indefinite" restart="never" nodeType="tmRoot">
+          <p:childTnLst>
+            <p:seq concurrent="1" nextAc="seek">
+              <p:cTn id="2" dur="indefinite" nodeType="mainSeq">
+                <p:childTnLst>
+                  <p:par>
+                    <p:cTn id="3" fill="hold">
+                      <p:stCondLst>
+                        <p:cond delay="indefinite"/>
+                      </p:stCondLst>
+                      <p:childTnLst>
+                        <p:par>
+                          <p:cTn id="4" fill="hold">
+                            <p:stCondLst>
+                              <p:cond delay="0"/>
+                            </p:stCondLst>
+                            <p:childTnLst>
+                              <p:par>
+                                <p:cTn id="5" presetID="1" presetClass="entr" presetSubtype="0" fill="hold" nodeType="clickEffect">
+                                  <p:stCondLst>
+                                    <p:cond delay="0"/>
+                                  </p:stCondLst>
+                                  <p:childTnLst>
+                                    <p:set>
+                                      <p:cBhvr>
+                                        <p:cTn id="6" dur="1" fill="hold">
+                                          <p:stCondLst>
+                                            <p:cond delay="0"/>
+                                          </p:stCondLst>
+                                        </p:cTn>
+                                        <p:tgtEl>
+                                          <p:spTgt spid="6">
+                                            <p:txEl>
+                                              <p:pRg st="0" end="0"/>
+                                            </p:txEl>
+                                          </p:spTgt>
+                                        </p:tgtEl>
+                                        <p:attrNameLst>
+                                          <p:attrName>style.visibility</p:attrName>
+                                        </p:attrNameLst>
+                                      </p:cBhvr>
+                                      <p:to>
+                                        <p:strVal val="visible"/>
+                                      </p:to>
+                                    </p:set>
+                                  </p:childTnLst>
+                                </p:cTn>
+                              </p:par>
+                            </p:childTnLst>
+                          </p:cTn>
+                        </p:par>
+                      </p:childTnLst>
+                    </p:cTn>
+                  </p:par>
+                  <p:par>
+                    <p:cTn id="7" fill="hold">
+                      <p:stCondLst>
+                        <p:cond delay="indefinite"/>
+                      </p:stCondLst>
+                      <p:childTnLst>
+                        <p:par>
+                          <p:cTn id="8" fill="hold">
+                            <p:stCondLst>
+                              <p:cond delay="0"/>
+                            </p:stCondLst>
+                            <p:childTnLst>
+                              <p:par>
+                                <p:cTn id="9" presetID="1" presetClass="entr" presetSubtype="0" fill="hold" nodeType="clickEffect">
+                                  <p:stCondLst>
+                                    <p:cond delay="0"/>
+                                  </p:stCondLst>
+                                  <p:childTnLst>
+                                    <p:set>
+                                      <p:cBhvr>
+                                        <p:cTn id="10" dur="1" fill="hold">
+                                          <p:stCondLst>
+                                            <p:cond delay="0"/>
+                                          </p:stCondLst>
+                                        </p:cTn>
+                                        <p:tgtEl>
+                                          <p:spTgt spid="6">
+                                            <p:txEl>
+                                              <p:pRg st="2" end="2"/>
+                                            </p:txEl>
+                                          </p:spTgt>
+                                        </p:tgtEl>
+                                        <p:attrNameLst>
+                                          <p:attrName>style.visibility</p:attrName>
+                                        </p:attrNameLst>
+                                      </p:cBhvr>
+                                      <p:to>
+                                        <p:strVal val="visible"/>
+                                      </p:to>
+                                    </p:set>
+                                  </p:childTnLst>
+                                </p:cTn>
+                              </p:par>
+                            </p:childTnLst>
+                          </p:cTn>
+                        </p:par>
+                      </p:childTnLst>
+                    </p:cTn>
+                  </p:par>
+                  <p:par>
+                    <p:cTn id="11" fill="hold">
+                      <p:stCondLst>
+                        <p:cond delay="indefinite"/>
+                      </p:stCondLst>
+                      <p:childTnLst>
+                        <p:par>
+                          <p:cTn id="12" fill="hold">
+                            <p:stCondLst>
+                              <p:cond delay="0"/>
+                            </p:stCondLst>
+                            <p:childTnLst>
+                              <p:par>
+                                <p:cTn id="13" presetID="1" presetClass="entr" presetSubtype="0" fill="hold" nodeType="clickEffect">
+                                  <p:stCondLst>
+                                    <p:cond delay="0"/>
+                                  </p:stCondLst>
+                                  <p:childTnLst>
+                                    <p:set>
+                                      <p:cBhvr>
+                                        <p:cTn id="14" dur="1" fill="hold">
+                                          <p:stCondLst>
+                                            <p:cond delay="0"/>
+                                          </p:stCondLst>
+                                        </p:cTn>
+                                        <p:tgtEl>
+                                          <p:spTgt spid="6">
+                                            <p:txEl>
+                                              <p:pRg st="4" end="4"/>
+                                            </p:txEl>
+                                          </p:spTgt>
+                                        </p:tgtEl>
+                                        <p:attrNameLst>
+                                          <p:attrName>style.visibility</p:attrName>
+                                        </p:attrNameLst>
+                                      </p:cBhvr>
+                                      <p:to>
+                                        <p:strVal val="visible"/>
+                                      </p:to>
+                                    </p:set>
+                                  </p:childTnLst>
+                                </p:cTn>
+                              </p:par>
+                            </p:childTnLst>
+                          </p:cTn>
+                        </p:par>
+                      </p:childTnLst>
+                    </p:cTn>
+                  </p:par>
+                  <p:par>
+                    <p:cTn id="15" fill="hold">
+                      <p:stCondLst>
+                        <p:cond delay="indefinite"/>
+                      </p:stCondLst>
+                      <p:childTnLst>
+                        <p:par>
+                          <p:cTn id="16" fill="hold">
+                            <p:stCondLst>
+                              <p:cond delay="0"/>
+                            </p:stCondLst>
+                            <p:childTnLst>
+                              <p:par>
+                                <p:cTn id="17" presetID="1" presetClass="entr" presetSubtype="0" fill="hold" nodeType="clickEffect">
+                                  <p:stCondLst>
+                                    <p:cond delay="0"/>
+                                  </p:stCondLst>
+                                  <p:childTnLst>
+                                    <p:set>
+                                      <p:cBhvr>
+                                        <p:cTn id="18" dur="1" fill="hold">
+                                          <p:stCondLst>
+                                            <p:cond delay="0"/>
+                                          </p:stCondLst>
+                                        </p:cTn>
+                                        <p:tgtEl>
+                                          <p:spTgt spid="6">
+                                            <p:txEl>
+                                              <p:pRg st="6" end="6"/>
+                                            </p:txEl>
+                                          </p:spTgt>
+                                        </p:tgtEl>
+                                        <p:attrNameLst>
+                                          <p:attrName>style.visibility</p:attrName>
+                                        </p:attrNameLst>
+                                      </p:cBhvr>
+                                      <p:to>
+                                        <p:strVal val="visible"/>
+                                      </p:to>
+                                    </p:set>
+                                  </p:childTnLst>
+                                </p:cTn>
+                              </p:par>
+                            </p:childTnLst>
+                          </p:cTn>
+                        </p:par>
+                      </p:childTnLst>
+                    </p:cTn>
+                  </p:par>
+                  <p:par>
+                    <p:cTn id="19" fill="hold">
+                      <p:stCondLst>
+                        <p:cond delay="indefinite"/>
+                      </p:stCondLst>
+                      <p:childTnLst>
+                        <p:par>
+                          <p:cTn id="20" fill="hold">
+                            <p:stCondLst>
+                              <p:cond delay="0"/>
+                            </p:stCondLst>
+                            <p:childTnLst>
+                              <p:par>
+                                <p:cTn id="21" presetID="1" presetClass="entr" presetSubtype="0" fill="hold" nodeType="clickEffect">
+                                  <p:stCondLst>
+                                    <p:cond delay="0"/>
+                                  </p:stCondLst>
+                                  <p:childTnLst>
+                                    <p:set>
+                                      <p:cBhvr>
+                                        <p:cTn id="22" dur="1" fill="hold">
+                                          <p:stCondLst>
+                                            <p:cond delay="0"/>
+                                          </p:stCondLst>
+                                        </p:cTn>
+                                        <p:tgtEl>
+                                          <p:spTgt spid="6">
+                                            <p:txEl>
+                                              <p:pRg st="8" end="8"/>
+                                            </p:txEl>
+                                          </p:spTgt>
+                                        </p:tgtEl>
+                                        <p:attrNameLst>
+                                          <p:attrName>style.visibility</p:attrName>
+                                        </p:attrNameLst>
+                                      </p:cBhvr>
+                                      <p:to>
+                                        <p:strVal val="visible"/>
+                                      </p:to>
+                                    </p:set>
+                                  </p:childTnLst>
+                                </p:cTn>
+                              </p:par>
+                            </p:childTnLst>
+                          </p:cTn>
+                        </p:par>
+                      </p:childTnLst>
+                    </p:cTn>
+                  </p:par>
+                </p:childTnLst>
+              </p:cTn>
+              <p:prevCondLst>
+                <p:cond evt="onPrev" delay="0">
+                  <p:tgtEl>
+                    <p:sldTgt/>
+                  </p:tgtEl>
+                </p:cond>
+              </p:prevCondLst>
+              <p:nextCondLst>
+                <p:cond evt="onNext" delay="0">
+                  <p:tgtEl>
+                    <p:sldTgt/>
+                  </p:tgtEl>
+                </p:cond>
+              </p:nextCondLst>
+            </p:seq>
+          </p:childTnLst>
+        </p:cTn>
+      </p:par>
+    </p:tnLst>
+  </p:timing>
+</p:sld>
+</file>
+
+<file path=ppt/slides/slide21.xml><?xml version="1.0" encoding="utf-8"?>
+<p:sld xmlns:a="http://schemas.openxmlformats.org/drawingml/2006/main" xmlns:r="http://schemas.openxmlformats.org/officeDocument/2006/relationships" xmlns:p="http://schemas.openxmlformats.org/presentationml/2006/main">
+  <p:cSld>
+    <p:spTree>
+      <p:nvGrpSpPr>
         <p:cNvPr id="1" name="Shape 330"/>
         <p:cNvGrpSpPr/>
         <p:nvPr/>
@@ -37260,7 +37816,7 @@
 </p:sld>
 </file>
 
-<file path=ppt/slides/slide21.xml><?xml version="1.0" encoding="utf-8"?>
+<file path=ppt/slides/slide22.xml><?xml version="1.0" encoding="utf-8"?>
 <p:sld xmlns:a="http://schemas.openxmlformats.org/drawingml/2006/main" xmlns:r="http://schemas.openxmlformats.org/officeDocument/2006/relationships" xmlns:p="http://schemas.openxmlformats.org/presentationml/2006/main">
   <p:cSld>
     <p:spTree>
@@ -37422,7 +37978,7 @@
 </p:sld>
 </file>
 
-<file path=ppt/slides/slide22.xml><?xml version="1.0" encoding="utf-8"?>
+<file path=ppt/slides/slide23.xml><?xml version="1.0" encoding="utf-8"?>
 <p:sld xmlns:a="http://schemas.openxmlformats.org/drawingml/2006/main" xmlns:r="http://schemas.openxmlformats.org/officeDocument/2006/relationships" xmlns:p="http://schemas.openxmlformats.org/presentationml/2006/main">
   <p:cSld>
     <p:spTree>
@@ -37482,7 +38038,7 @@
 </p:sld>
 </file>
 
-<file path=ppt/slides/slide23.xml><?xml version="1.0" encoding="utf-8"?>
+<file path=ppt/slides/slide24.xml><?xml version="1.0" encoding="utf-8"?>
 <p:sld xmlns:a="http://schemas.openxmlformats.org/drawingml/2006/main" xmlns:r="http://schemas.openxmlformats.org/officeDocument/2006/relationships" xmlns:p="http://schemas.openxmlformats.org/presentationml/2006/main">
   <p:cSld>
     <p:spTree>
@@ -37553,7 +38109,7 @@
 </p:sld>
 </file>
 
-<file path=ppt/slides/slide24.xml><?xml version="1.0" encoding="utf-8"?>
+<file path=ppt/slides/slide25.xml><?xml version="1.0" encoding="utf-8"?>
 <p:sld xmlns:a="http://schemas.openxmlformats.org/drawingml/2006/main" xmlns:r="http://schemas.openxmlformats.org/officeDocument/2006/relationships" xmlns:p="http://schemas.openxmlformats.org/presentationml/2006/main">
   <p:cSld>
     <p:spTree>
@@ -38242,7 +38798,7 @@
 </p:sld>
 </file>
 
-<file path=ppt/slides/slide25.xml><?xml version="1.0" encoding="utf-8"?>
+<file path=ppt/slides/slide26.xml><?xml version="1.0" encoding="utf-8"?>
 <p:sld xmlns:a="http://schemas.openxmlformats.org/drawingml/2006/main" xmlns:r="http://schemas.openxmlformats.org/officeDocument/2006/relationships" xmlns:p="http://schemas.openxmlformats.org/presentationml/2006/main">
   <p:cSld>
     <p:spTree>
@@ -38500,7 +39056,7 @@
 </p:sld>
 </file>
 
-<file path=ppt/slides/slide26.xml><?xml version="1.0" encoding="utf-8"?>
+<file path=ppt/slides/slide27.xml><?xml version="1.0" encoding="utf-8"?>
 <p:sld xmlns:a="http://schemas.openxmlformats.org/drawingml/2006/main" xmlns:r="http://schemas.openxmlformats.org/officeDocument/2006/relationships" xmlns:p="http://schemas.openxmlformats.org/presentationml/2006/main">
   <p:cSld>
     <p:spTree>
@@ -38642,7 +39198,7 @@
           <a:p>
             <a:fld id="{334F72C3-CDF3-44A8-B602-1649B1728485}" type="datetime3">
               <a:rPr lang="en-US" smtClean="0"/>
-              <a:t>2 June 2026</a:t>
+              <a:t>3 June 2026</a:t>
             </a:fld>
             <a:endParaRPr lang="en-US"/>
           </a:p>
@@ -38672,7 +39228,7 @@
             <a:fld id="{64E5BE4B-2FBF-4174-9E62-85FAD1CB43A6}" type="slidenum">
               <a:rPr lang="en-US" smtClean="0"/>
               <a:pPr/>
-              <a:t>26</a:t>
+              <a:t>27</a:t>
             </a:fld>
             <a:endParaRPr lang="en-US"/>
           </a:p>
@@ -38921,7 +39477,7 @@
 </p:sld>
 </file>
 
-<file path=ppt/slides/slide27.xml><?xml version="1.0" encoding="utf-8"?>
+<file path=ppt/slides/slide28.xml><?xml version="1.0" encoding="utf-8"?>
 <p:sld xmlns:a="http://schemas.openxmlformats.org/drawingml/2006/main" xmlns:r="http://schemas.openxmlformats.org/officeDocument/2006/relationships" xmlns:p="http://schemas.openxmlformats.org/presentationml/2006/main">
   <p:cSld>
     <p:spTree>
@@ -38967,7 +39523,7 @@
           <a:p>
             <a:fld id="{334F72C3-CDF3-44A8-B602-1649B1728485}" type="datetime3">
               <a:rPr lang="en-US" smtClean="0"/>
-              <a:t>2 June 2026</a:t>
+              <a:t>3 June 2026</a:t>
             </a:fld>
             <a:endParaRPr lang="en-US"/>
           </a:p>
@@ -38997,7 +39553,7 @@
             <a:fld id="{64E5BE4B-2FBF-4174-9E62-85FAD1CB43A6}" type="slidenum">
               <a:rPr lang="en-US" smtClean="0"/>
               <a:pPr/>
-              <a:t>27</a:t>
+              <a:t>28</a:t>
             </a:fld>
             <a:endParaRPr lang="en-US"/>
           </a:p>
@@ -39146,7 +39702,7 @@
 </p:sld>
 </file>
 
-<file path=ppt/slides/slide28.xml><?xml version="1.0" encoding="utf-8"?>
+<file path=ppt/slides/slide29.xml><?xml version="1.0" encoding="utf-8"?>
 <p:sld xmlns:a="http://schemas.openxmlformats.org/drawingml/2006/main" xmlns:r="http://schemas.openxmlformats.org/officeDocument/2006/relationships" xmlns:p="http://schemas.openxmlformats.org/presentationml/2006/main">
   <p:cSld>
     <p:spTree>
@@ -39192,7 +39748,7 @@
           <a:p>
             <a:fld id="{334F72C3-CDF3-44A8-B602-1649B1728485}" type="datetime3">
               <a:rPr lang="en-US" smtClean="0"/>
-              <a:t>2 June 2026</a:t>
+              <a:t>3 June 2026</a:t>
             </a:fld>
             <a:endParaRPr lang="en-US"/>
           </a:p>
@@ -39222,7 +39778,7 @@
             <a:fld id="{64E5BE4B-2FBF-4174-9E62-85FAD1CB43A6}" type="slidenum">
               <a:rPr lang="en-US" smtClean="0"/>
               <a:pPr/>
-              <a:t>28</a:t>
+              <a:t>29</a:t>
             </a:fld>
             <a:endParaRPr lang="en-US"/>
           </a:p>
@@ -39550,507 +40106,6 @@
                                           <p:spTgt spid="11">
                                             <p:txEl>
                                               <p:pRg st="7" end="7"/>
-                                            </p:txEl>
-                                          </p:spTgt>
-                                        </p:tgtEl>
-                                        <p:attrNameLst>
-                                          <p:attrName>style.visibility</p:attrName>
-                                        </p:attrNameLst>
-                                      </p:cBhvr>
-                                      <p:to>
-                                        <p:strVal val="visible"/>
-                                      </p:to>
-                                    </p:set>
-                                  </p:childTnLst>
-                                </p:cTn>
-                              </p:par>
-                            </p:childTnLst>
-                          </p:cTn>
-                        </p:par>
-                      </p:childTnLst>
-                    </p:cTn>
-                  </p:par>
-                </p:childTnLst>
-              </p:cTn>
-              <p:prevCondLst>
-                <p:cond evt="onPrev" delay="0">
-                  <p:tgtEl>
-                    <p:sldTgt/>
-                  </p:tgtEl>
-                </p:cond>
-              </p:prevCondLst>
-              <p:nextCondLst>
-                <p:cond evt="onNext" delay="0">
-                  <p:tgtEl>
-                    <p:sldTgt/>
-                  </p:tgtEl>
-                </p:cond>
-              </p:nextCondLst>
-            </p:seq>
-          </p:childTnLst>
-        </p:cTn>
-      </p:par>
-    </p:tnLst>
-  </p:timing>
-</p:sld>
-</file>
-
-<file path=ppt/slides/slide29.xml><?xml version="1.0" encoding="utf-8"?>
-<p:sld xmlns:a="http://schemas.openxmlformats.org/drawingml/2006/main" xmlns:r="http://schemas.openxmlformats.org/officeDocument/2006/relationships" xmlns:p="http://schemas.openxmlformats.org/presentationml/2006/main">
-  <p:cSld>
-    <p:spTree>
-      <p:nvGrpSpPr>
-        <p:cNvPr id="1" name="">
-          <a:extLst>
-            <a:ext uri="{FF2B5EF4-FFF2-40B4-BE49-F238E27FC236}">
-              <a16:creationId xmlns:a16="http://schemas.microsoft.com/office/drawing/2014/main" id="{01B00F46-32C4-D97A-2CDA-CB446227CEA0}"/>
-            </a:ext>
-          </a:extLst>
-        </p:cNvPr>
-        <p:cNvGrpSpPr/>
-        <p:nvPr/>
-      </p:nvGrpSpPr>
-      <p:grpSpPr>
-        <a:xfrm>
-          <a:off x="0" y="0"/>
-          <a:ext cx="0" cy="0"/>
-          <a:chOff x="0" y="0"/>
-          <a:chExt cx="0" cy="0"/>
-        </a:xfrm>
-      </p:grpSpPr>
-      <p:sp>
-        <p:nvSpPr>
-          <p:cNvPr id="5" name="Date Placeholder 4">
-            <a:extLst>
-              <a:ext uri="{FF2B5EF4-FFF2-40B4-BE49-F238E27FC236}">
-                <a16:creationId xmlns:a16="http://schemas.microsoft.com/office/drawing/2014/main" id="{58A5710F-3054-E3CB-71DD-AE876996C2BA}"/>
-              </a:ext>
-            </a:extLst>
-          </p:cNvPr>
-          <p:cNvSpPr>
-            <a:spLocks noGrp="1"/>
-          </p:cNvSpPr>
-          <p:nvPr>
-            <p:ph type="dt" sz="half" idx="10"/>
-          </p:nvPr>
-        </p:nvSpPr>
-        <p:spPr/>
-        <p:txBody>
-          <a:bodyPr/>
-          <a:lstStyle/>
-          <a:p>
-            <a:fld id="{334F72C3-CDF3-44A8-B602-1649B1728485}" type="datetime3">
-              <a:rPr lang="en-US" smtClean="0"/>
-              <a:t>2 June 2026</a:t>
-            </a:fld>
-            <a:endParaRPr lang="en-US"/>
-          </a:p>
-        </p:txBody>
-      </p:sp>
-      <p:sp>
-        <p:nvSpPr>
-          <p:cNvPr id="6" name="Slide Number Placeholder 5">
-            <a:extLst>
-              <a:ext uri="{FF2B5EF4-FFF2-40B4-BE49-F238E27FC236}">
-                <a16:creationId xmlns:a16="http://schemas.microsoft.com/office/drawing/2014/main" id="{1B994C50-A130-65F9-787C-BB8C6524C06C}"/>
-              </a:ext>
-            </a:extLst>
-          </p:cNvPr>
-          <p:cNvSpPr>
-            <a:spLocks noGrp="1"/>
-          </p:cNvSpPr>
-          <p:nvPr>
-            <p:ph type="sldNum" sz="quarter" idx="11"/>
-          </p:nvPr>
-        </p:nvSpPr>
-        <p:spPr/>
-        <p:txBody>
-          <a:bodyPr/>
-          <a:lstStyle/>
-          <a:p>
-            <a:fld id="{64E5BE4B-2FBF-4174-9E62-85FAD1CB43A6}" type="slidenum">
-              <a:rPr lang="en-US" smtClean="0"/>
-              <a:pPr/>
-              <a:t>29</a:t>
-            </a:fld>
-            <a:endParaRPr lang="en-US"/>
-          </a:p>
-        </p:txBody>
-      </p:sp>
-      <p:sp>
-        <p:nvSpPr>
-          <p:cNvPr id="11" name="Content Placeholder 10">
-            <a:extLst>
-              <a:ext uri="{FF2B5EF4-FFF2-40B4-BE49-F238E27FC236}">
-                <a16:creationId xmlns:a16="http://schemas.microsoft.com/office/drawing/2014/main" id="{18A659BD-04EB-5DBE-153D-2B26AD2B9A9C}"/>
-              </a:ext>
-            </a:extLst>
-          </p:cNvPr>
-          <p:cNvSpPr>
-            <a:spLocks noGrp="1"/>
-          </p:cNvSpPr>
-          <p:nvPr>
-            <p:ph sz="half" idx="1"/>
-          </p:nvPr>
-        </p:nvSpPr>
-        <p:spPr>
-          <a:xfrm>
-            <a:off x="411478" y="1200150"/>
-            <a:ext cx="8219566" cy="3429000"/>
-          </a:xfrm>
-        </p:spPr>
-        <p:txBody>
-          <a:bodyPr/>
-          <a:lstStyle/>
-          <a:p>
-            <a:r>
-              <a:rPr lang="en-US" sz="1800" dirty="0"/>
-              <a:t>Can print multiple statements, separated by a comma.</a:t>
-            </a:r>
-          </a:p>
-          <a:p>
-            <a:endParaRPr lang="en-US" sz="1800" dirty="0"/>
-          </a:p>
-          <a:p>
-            <a:endParaRPr lang="en-US" sz="1800" dirty="0"/>
-          </a:p>
-          <a:p>
-            <a:endParaRPr lang="en-US" sz="1800" dirty="0"/>
-          </a:p>
-          <a:p>
-            <a:endParaRPr lang="en-US" sz="1800" dirty="0"/>
-          </a:p>
-          <a:p>
-            <a:endParaRPr lang="en-US" sz="1800" dirty="0"/>
-          </a:p>
-          <a:p>
-            <a:endParaRPr lang="en-US" sz="1800" dirty="0"/>
-          </a:p>
-          <a:p>
-            <a:endParaRPr lang="en-US" sz="1800" dirty="0"/>
-          </a:p>
-          <a:p>
-            <a:r>
-              <a:rPr lang="en-US" sz="1800" dirty="0"/>
-              <a:t>What do you notice about the output on the right?</a:t>
-            </a:r>
-          </a:p>
-          <a:p>
-            <a:endParaRPr lang="en-US" sz="1800" dirty="0"/>
-          </a:p>
-          <a:p>
-            <a:endParaRPr lang="en-US" sz="1800" dirty="0"/>
-          </a:p>
-        </p:txBody>
-      </p:sp>
-      <p:sp>
-        <p:nvSpPr>
-          <p:cNvPr id="3" name="Google Shape;319;p55">
-            <a:extLst>
-              <a:ext uri="{FF2B5EF4-FFF2-40B4-BE49-F238E27FC236}">
-                <a16:creationId xmlns:a16="http://schemas.microsoft.com/office/drawing/2014/main" id="{03186685-4D5D-E9C1-362A-E2AACD998E24}"/>
-              </a:ext>
-            </a:extLst>
-          </p:cNvPr>
-          <p:cNvSpPr txBox="1">
-            <a:spLocks/>
-          </p:cNvSpPr>
-          <p:nvPr/>
-        </p:nvSpPr>
-        <p:spPr>
-          <a:xfrm>
-            <a:off x="288816" y="408972"/>
-            <a:ext cx="6173470" cy="685800"/>
-          </a:xfrm>
-          <a:prstGeom prst="rect">
-            <a:avLst/>
-          </a:prstGeom>
-          <a:noFill/>
-          <a:ln>
-            <a:noFill/>
-          </a:ln>
-        </p:spPr>
-        <p:txBody>
-          <a:bodyPr spcFirstLastPara="1" vert="horz" wrap="square" lIns="91425" tIns="45700" rIns="91425" bIns="45700" rtlCol="0" anchor="ctr" anchorCtr="0">
-            <a:normAutofit lnSpcReduction="10000"/>
-          </a:bodyPr>
-          <a:lstStyle>
-            <a:lvl1pPr algn="l" defTabSz="685800" rtl="0" eaLnBrk="1" latinLnBrk="0" hangingPunct="1">
-              <a:lnSpc>
-                <a:spcPct val="90000"/>
-              </a:lnSpc>
-              <a:spcBef>
-                <a:spcPct val="0"/>
-              </a:spcBef>
-              <a:buNone/>
-              <a:defRPr sz="2400" kern="1200" cap="all" baseline="0">
-                <a:solidFill>
-                  <a:schemeClr val="tx1"/>
-                </a:solidFill>
-                <a:latin typeface="+mj-lt"/>
-                <a:ea typeface="+mj-ea"/>
-                <a:cs typeface="+mj-cs"/>
-              </a:defRPr>
-            </a:lvl1pPr>
-          </a:lstStyle>
-          <a:p>
-            <a:pPr>
-              <a:buClrTx/>
-              <a:buFontTx/>
-            </a:pPr>
-            <a:r>
-              <a:rPr lang="en-US" dirty="0"/>
-              <a:t>MORE INFORMATION ABOU THE PRINT FUNCTION</a:t>
-            </a:r>
-          </a:p>
-        </p:txBody>
-      </p:sp>
-      <p:pic>
-        <p:nvPicPr>
-          <p:cNvPr id="10" name="Picture 9">
-            <a:extLst>
-              <a:ext uri="{FF2B5EF4-FFF2-40B4-BE49-F238E27FC236}">
-                <a16:creationId xmlns:a16="http://schemas.microsoft.com/office/drawing/2014/main" id="{1FF3B86D-3DF5-F1CB-FC04-16E075C19DF9}"/>
-              </a:ext>
-            </a:extLst>
-          </p:cNvPr>
-          <p:cNvPicPr>
-            <a:picLocks noChangeAspect="1"/>
-          </p:cNvPicPr>
-          <p:nvPr/>
-        </p:nvPicPr>
-        <p:blipFill>
-          <a:blip r:embed="rId2"/>
-          <a:stretch>
-            <a:fillRect/>
-          </a:stretch>
-        </p:blipFill>
-        <p:spPr>
-          <a:xfrm>
-            <a:off x="1192261" y="1609399"/>
-            <a:ext cx="3848637" cy="2333951"/>
-          </a:xfrm>
-          <a:prstGeom prst="rect">
-            <a:avLst/>
-          </a:prstGeom>
-        </p:spPr>
-      </p:pic>
-      <p:pic>
-        <p:nvPicPr>
-          <p:cNvPr id="13" name="Picture 12">
-            <a:extLst>
-              <a:ext uri="{FF2B5EF4-FFF2-40B4-BE49-F238E27FC236}">
-                <a16:creationId xmlns:a16="http://schemas.microsoft.com/office/drawing/2014/main" id="{97E769B3-5743-59FB-9517-7A2D390AF72F}"/>
-              </a:ext>
-            </a:extLst>
-          </p:cNvPr>
-          <p:cNvPicPr>
-            <a:picLocks noChangeAspect="1"/>
-          </p:cNvPicPr>
-          <p:nvPr/>
-        </p:nvPicPr>
-        <p:blipFill>
-          <a:blip r:embed="rId3"/>
-          <a:stretch>
-            <a:fillRect/>
-          </a:stretch>
-        </p:blipFill>
-        <p:spPr>
-          <a:xfrm>
-            <a:off x="5821681" y="2143065"/>
-            <a:ext cx="2324424" cy="857370"/>
-          </a:xfrm>
-          <a:prstGeom prst="rect">
-            <a:avLst/>
-          </a:prstGeom>
-        </p:spPr>
-      </p:pic>
-    </p:spTree>
-    <p:extLst>
-      <p:ext uri="{BB962C8B-B14F-4D97-AF65-F5344CB8AC3E}">
-        <p14:creationId xmlns:p14="http://schemas.microsoft.com/office/powerpoint/2010/main" val="3782415045"/>
-      </p:ext>
-    </p:extLst>
-  </p:cSld>
-  <p:clrMapOvr>
-    <a:masterClrMapping/>
-  </p:clrMapOvr>
-  <p:timing>
-    <p:tnLst>
-      <p:par>
-        <p:cTn id="1" dur="indefinite" restart="never" nodeType="tmRoot">
-          <p:childTnLst>
-            <p:seq concurrent="1" nextAc="seek">
-              <p:cTn id="2" dur="indefinite" nodeType="mainSeq">
-                <p:childTnLst>
-                  <p:par>
-                    <p:cTn id="3" fill="hold">
-                      <p:stCondLst>
-                        <p:cond delay="indefinite"/>
-                      </p:stCondLst>
-                      <p:childTnLst>
-                        <p:par>
-                          <p:cTn id="4" fill="hold">
-                            <p:stCondLst>
-                              <p:cond delay="0"/>
-                            </p:stCondLst>
-                            <p:childTnLst>
-                              <p:par>
-                                <p:cTn id="5" presetID="1" presetClass="entr" presetSubtype="0" fill="hold" nodeType="clickEffect">
-                                  <p:stCondLst>
-                                    <p:cond delay="0"/>
-                                  </p:stCondLst>
-                                  <p:childTnLst>
-                                    <p:set>
-                                      <p:cBhvr>
-                                        <p:cTn id="6" dur="1" fill="hold">
-                                          <p:stCondLst>
-                                            <p:cond delay="0"/>
-                                          </p:stCondLst>
-                                        </p:cTn>
-                                        <p:tgtEl>
-                                          <p:spTgt spid="11">
-                                            <p:txEl>
-                                              <p:pRg st="0" end="0"/>
-                                            </p:txEl>
-                                          </p:spTgt>
-                                        </p:tgtEl>
-                                        <p:attrNameLst>
-                                          <p:attrName>style.visibility</p:attrName>
-                                        </p:attrNameLst>
-                                      </p:cBhvr>
-                                      <p:to>
-                                        <p:strVal val="visible"/>
-                                      </p:to>
-                                    </p:set>
-                                  </p:childTnLst>
-                                </p:cTn>
-                              </p:par>
-                            </p:childTnLst>
-                          </p:cTn>
-                        </p:par>
-                      </p:childTnLst>
-                    </p:cTn>
-                  </p:par>
-                  <p:par>
-                    <p:cTn id="7" fill="hold">
-                      <p:stCondLst>
-                        <p:cond delay="indefinite"/>
-                      </p:stCondLst>
-                      <p:childTnLst>
-                        <p:par>
-                          <p:cTn id="8" fill="hold">
-                            <p:stCondLst>
-                              <p:cond delay="0"/>
-                            </p:stCondLst>
-                            <p:childTnLst>
-                              <p:par>
-                                <p:cTn id="9" presetID="1" presetClass="entr" presetSubtype="0" fill="hold" nodeType="clickEffect">
-                                  <p:stCondLst>
-                                    <p:cond delay="0"/>
-                                  </p:stCondLst>
-                                  <p:childTnLst>
-                                    <p:set>
-                                      <p:cBhvr>
-                                        <p:cTn id="10" dur="1" fill="hold">
-                                          <p:stCondLst>
-                                            <p:cond delay="0"/>
-                                          </p:stCondLst>
-                                        </p:cTn>
-                                        <p:tgtEl>
-                                          <p:spTgt spid="10"/>
-                                        </p:tgtEl>
-                                        <p:attrNameLst>
-                                          <p:attrName>style.visibility</p:attrName>
-                                        </p:attrNameLst>
-                                      </p:cBhvr>
-                                      <p:to>
-                                        <p:strVal val="visible"/>
-                                      </p:to>
-                                    </p:set>
-                                  </p:childTnLst>
-                                </p:cTn>
-                              </p:par>
-                            </p:childTnLst>
-                          </p:cTn>
-                        </p:par>
-                      </p:childTnLst>
-                    </p:cTn>
-                  </p:par>
-                  <p:par>
-                    <p:cTn id="11" fill="hold">
-                      <p:stCondLst>
-                        <p:cond delay="indefinite"/>
-                      </p:stCondLst>
-                      <p:childTnLst>
-                        <p:par>
-                          <p:cTn id="12" fill="hold">
-                            <p:stCondLst>
-                              <p:cond delay="0"/>
-                            </p:stCondLst>
-                            <p:childTnLst>
-                              <p:par>
-                                <p:cTn id="13" presetID="1" presetClass="entr" presetSubtype="0" fill="hold" nodeType="clickEffect">
-                                  <p:stCondLst>
-                                    <p:cond delay="0"/>
-                                  </p:stCondLst>
-                                  <p:childTnLst>
-                                    <p:set>
-                                      <p:cBhvr>
-                                        <p:cTn id="14" dur="1" fill="hold">
-                                          <p:stCondLst>
-                                            <p:cond delay="0"/>
-                                          </p:stCondLst>
-                                        </p:cTn>
-                                        <p:tgtEl>
-                                          <p:spTgt spid="13"/>
-                                        </p:tgtEl>
-                                        <p:attrNameLst>
-                                          <p:attrName>style.visibility</p:attrName>
-                                        </p:attrNameLst>
-                                      </p:cBhvr>
-                                      <p:to>
-                                        <p:strVal val="visible"/>
-                                      </p:to>
-                                    </p:set>
-                                  </p:childTnLst>
-                                </p:cTn>
-                              </p:par>
-                            </p:childTnLst>
-                          </p:cTn>
-                        </p:par>
-                      </p:childTnLst>
-                    </p:cTn>
-                  </p:par>
-                  <p:par>
-                    <p:cTn id="15" fill="hold">
-                      <p:stCondLst>
-                        <p:cond delay="indefinite"/>
-                      </p:stCondLst>
-                      <p:childTnLst>
-                        <p:par>
-                          <p:cTn id="16" fill="hold">
-                            <p:stCondLst>
-                              <p:cond delay="0"/>
-                            </p:stCondLst>
-                            <p:childTnLst>
-                              <p:par>
-                                <p:cTn id="17" presetID="1" presetClass="entr" presetSubtype="0" fill="hold" nodeType="clickEffect">
-                                  <p:stCondLst>
-                                    <p:cond delay="0"/>
-                                  </p:stCondLst>
-                                  <p:childTnLst>
-                                    <p:set>
-                                      <p:cBhvr>
-                                        <p:cTn id="18" dur="1" fill="hold">
-                                          <p:stCondLst>
-                                            <p:cond delay="0"/>
-                                          </p:stCondLst>
-                                        </p:cTn>
-                                        <p:tgtEl>
-                                          <p:spTgt spid="11">
-                                            <p:txEl>
-                                              <p:pRg st="8" end="8"/>
                                             </p:txEl>
                                           </p:spTgt>
                                         </p:tgtEl>
@@ -40747,6 +40802,507 @@
         <p:cNvPr id="1" name="">
           <a:extLst>
             <a:ext uri="{FF2B5EF4-FFF2-40B4-BE49-F238E27FC236}">
+              <a16:creationId xmlns:a16="http://schemas.microsoft.com/office/drawing/2014/main" id="{01B00F46-32C4-D97A-2CDA-CB446227CEA0}"/>
+            </a:ext>
+          </a:extLst>
+        </p:cNvPr>
+        <p:cNvGrpSpPr/>
+        <p:nvPr/>
+      </p:nvGrpSpPr>
+      <p:grpSpPr>
+        <a:xfrm>
+          <a:off x="0" y="0"/>
+          <a:ext cx="0" cy="0"/>
+          <a:chOff x="0" y="0"/>
+          <a:chExt cx="0" cy="0"/>
+        </a:xfrm>
+      </p:grpSpPr>
+      <p:sp>
+        <p:nvSpPr>
+          <p:cNvPr id="5" name="Date Placeholder 4">
+            <a:extLst>
+              <a:ext uri="{FF2B5EF4-FFF2-40B4-BE49-F238E27FC236}">
+                <a16:creationId xmlns:a16="http://schemas.microsoft.com/office/drawing/2014/main" id="{58A5710F-3054-E3CB-71DD-AE876996C2BA}"/>
+              </a:ext>
+            </a:extLst>
+          </p:cNvPr>
+          <p:cNvSpPr>
+            <a:spLocks noGrp="1"/>
+          </p:cNvSpPr>
+          <p:nvPr>
+            <p:ph type="dt" sz="half" idx="10"/>
+          </p:nvPr>
+        </p:nvSpPr>
+        <p:spPr/>
+        <p:txBody>
+          <a:bodyPr/>
+          <a:lstStyle/>
+          <a:p>
+            <a:fld id="{334F72C3-CDF3-44A8-B602-1649B1728485}" type="datetime3">
+              <a:rPr lang="en-US" smtClean="0"/>
+              <a:t>3 June 2026</a:t>
+            </a:fld>
+            <a:endParaRPr lang="en-US"/>
+          </a:p>
+        </p:txBody>
+      </p:sp>
+      <p:sp>
+        <p:nvSpPr>
+          <p:cNvPr id="6" name="Slide Number Placeholder 5">
+            <a:extLst>
+              <a:ext uri="{FF2B5EF4-FFF2-40B4-BE49-F238E27FC236}">
+                <a16:creationId xmlns:a16="http://schemas.microsoft.com/office/drawing/2014/main" id="{1B994C50-A130-65F9-787C-BB8C6524C06C}"/>
+              </a:ext>
+            </a:extLst>
+          </p:cNvPr>
+          <p:cNvSpPr>
+            <a:spLocks noGrp="1"/>
+          </p:cNvSpPr>
+          <p:nvPr>
+            <p:ph type="sldNum" sz="quarter" idx="11"/>
+          </p:nvPr>
+        </p:nvSpPr>
+        <p:spPr/>
+        <p:txBody>
+          <a:bodyPr/>
+          <a:lstStyle/>
+          <a:p>
+            <a:fld id="{64E5BE4B-2FBF-4174-9E62-85FAD1CB43A6}" type="slidenum">
+              <a:rPr lang="en-US" smtClean="0"/>
+              <a:pPr/>
+              <a:t>30</a:t>
+            </a:fld>
+            <a:endParaRPr lang="en-US"/>
+          </a:p>
+        </p:txBody>
+      </p:sp>
+      <p:sp>
+        <p:nvSpPr>
+          <p:cNvPr id="11" name="Content Placeholder 10">
+            <a:extLst>
+              <a:ext uri="{FF2B5EF4-FFF2-40B4-BE49-F238E27FC236}">
+                <a16:creationId xmlns:a16="http://schemas.microsoft.com/office/drawing/2014/main" id="{18A659BD-04EB-5DBE-153D-2B26AD2B9A9C}"/>
+              </a:ext>
+            </a:extLst>
+          </p:cNvPr>
+          <p:cNvSpPr>
+            <a:spLocks noGrp="1"/>
+          </p:cNvSpPr>
+          <p:nvPr>
+            <p:ph sz="half" idx="1"/>
+          </p:nvPr>
+        </p:nvSpPr>
+        <p:spPr>
+          <a:xfrm>
+            <a:off x="411478" y="1200150"/>
+            <a:ext cx="8219566" cy="3429000"/>
+          </a:xfrm>
+        </p:spPr>
+        <p:txBody>
+          <a:bodyPr/>
+          <a:lstStyle/>
+          <a:p>
+            <a:r>
+              <a:rPr lang="en-US" sz="1800" dirty="0"/>
+              <a:t>Can print multiple statements, separated by a comma.</a:t>
+            </a:r>
+          </a:p>
+          <a:p>
+            <a:endParaRPr lang="en-US" sz="1800" dirty="0"/>
+          </a:p>
+          <a:p>
+            <a:endParaRPr lang="en-US" sz="1800" dirty="0"/>
+          </a:p>
+          <a:p>
+            <a:endParaRPr lang="en-US" sz="1800" dirty="0"/>
+          </a:p>
+          <a:p>
+            <a:endParaRPr lang="en-US" sz="1800" dirty="0"/>
+          </a:p>
+          <a:p>
+            <a:endParaRPr lang="en-US" sz="1800" dirty="0"/>
+          </a:p>
+          <a:p>
+            <a:endParaRPr lang="en-US" sz="1800" dirty="0"/>
+          </a:p>
+          <a:p>
+            <a:endParaRPr lang="en-US" sz="1800" dirty="0"/>
+          </a:p>
+          <a:p>
+            <a:r>
+              <a:rPr lang="en-US" sz="1800" dirty="0"/>
+              <a:t>What do you notice about the output on the right?</a:t>
+            </a:r>
+          </a:p>
+          <a:p>
+            <a:endParaRPr lang="en-US" sz="1800" dirty="0"/>
+          </a:p>
+          <a:p>
+            <a:endParaRPr lang="en-US" sz="1800" dirty="0"/>
+          </a:p>
+        </p:txBody>
+      </p:sp>
+      <p:sp>
+        <p:nvSpPr>
+          <p:cNvPr id="3" name="Google Shape;319;p55">
+            <a:extLst>
+              <a:ext uri="{FF2B5EF4-FFF2-40B4-BE49-F238E27FC236}">
+                <a16:creationId xmlns:a16="http://schemas.microsoft.com/office/drawing/2014/main" id="{03186685-4D5D-E9C1-362A-E2AACD998E24}"/>
+              </a:ext>
+            </a:extLst>
+          </p:cNvPr>
+          <p:cNvSpPr txBox="1">
+            <a:spLocks/>
+          </p:cNvSpPr>
+          <p:nvPr/>
+        </p:nvSpPr>
+        <p:spPr>
+          <a:xfrm>
+            <a:off x="288816" y="408972"/>
+            <a:ext cx="6173470" cy="685800"/>
+          </a:xfrm>
+          <a:prstGeom prst="rect">
+            <a:avLst/>
+          </a:prstGeom>
+          <a:noFill/>
+          <a:ln>
+            <a:noFill/>
+          </a:ln>
+        </p:spPr>
+        <p:txBody>
+          <a:bodyPr spcFirstLastPara="1" vert="horz" wrap="square" lIns="91425" tIns="45700" rIns="91425" bIns="45700" rtlCol="0" anchor="ctr" anchorCtr="0">
+            <a:normAutofit lnSpcReduction="10000"/>
+          </a:bodyPr>
+          <a:lstStyle>
+            <a:lvl1pPr algn="l" defTabSz="685800" rtl="0" eaLnBrk="1" latinLnBrk="0" hangingPunct="1">
+              <a:lnSpc>
+                <a:spcPct val="90000"/>
+              </a:lnSpc>
+              <a:spcBef>
+                <a:spcPct val="0"/>
+              </a:spcBef>
+              <a:buNone/>
+              <a:defRPr sz="2400" kern="1200" cap="all" baseline="0">
+                <a:solidFill>
+                  <a:schemeClr val="tx1"/>
+                </a:solidFill>
+                <a:latin typeface="+mj-lt"/>
+                <a:ea typeface="+mj-ea"/>
+                <a:cs typeface="+mj-cs"/>
+              </a:defRPr>
+            </a:lvl1pPr>
+          </a:lstStyle>
+          <a:p>
+            <a:pPr>
+              <a:buClrTx/>
+              <a:buFontTx/>
+            </a:pPr>
+            <a:r>
+              <a:rPr lang="en-US" dirty="0"/>
+              <a:t>MORE INFORMATION ABOU THE PRINT FUNCTION</a:t>
+            </a:r>
+          </a:p>
+        </p:txBody>
+      </p:sp>
+      <p:pic>
+        <p:nvPicPr>
+          <p:cNvPr id="10" name="Picture 9">
+            <a:extLst>
+              <a:ext uri="{FF2B5EF4-FFF2-40B4-BE49-F238E27FC236}">
+                <a16:creationId xmlns:a16="http://schemas.microsoft.com/office/drawing/2014/main" id="{1FF3B86D-3DF5-F1CB-FC04-16E075C19DF9}"/>
+              </a:ext>
+            </a:extLst>
+          </p:cNvPr>
+          <p:cNvPicPr>
+            <a:picLocks noChangeAspect="1"/>
+          </p:cNvPicPr>
+          <p:nvPr/>
+        </p:nvPicPr>
+        <p:blipFill>
+          <a:blip r:embed="rId2"/>
+          <a:stretch>
+            <a:fillRect/>
+          </a:stretch>
+        </p:blipFill>
+        <p:spPr>
+          <a:xfrm>
+            <a:off x="1192261" y="1609399"/>
+            <a:ext cx="3848637" cy="2333951"/>
+          </a:xfrm>
+          <a:prstGeom prst="rect">
+            <a:avLst/>
+          </a:prstGeom>
+        </p:spPr>
+      </p:pic>
+      <p:pic>
+        <p:nvPicPr>
+          <p:cNvPr id="13" name="Picture 12">
+            <a:extLst>
+              <a:ext uri="{FF2B5EF4-FFF2-40B4-BE49-F238E27FC236}">
+                <a16:creationId xmlns:a16="http://schemas.microsoft.com/office/drawing/2014/main" id="{97E769B3-5743-59FB-9517-7A2D390AF72F}"/>
+              </a:ext>
+            </a:extLst>
+          </p:cNvPr>
+          <p:cNvPicPr>
+            <a:picLocks noChangeAspect="1"/>
+          </p:cNvPicPr>
+          <p:nvPr/>
+        </p:nvPicPr>
+        <p:blipFill>
+          <a:blip r:embed="rId3"/>
+          <a:stretch>
+            <a:fillRect/>
+          </a:stretch>
+        </p:blipFill>
+        <p:spPr>
+          <a:xfrm>
+            <a:off x="5821681" y="2143065"/>
+            <a:ext cx="2324424" cy="857370"/>
+          </a:xfrm>
+          <a:prstGeom prst="rect">
+            <a:avLst/>
+          </a:prstGeom>
+        </p:spPr>
+      </p:pic>
+    </p:spTree>
+    <p:extLst>
+      <p:ext uri="{BB962C8B-B14F-4D97-AF65-F5344CB8AC3E}">
+        <p14:creationId xmlns:p14="http://schemas.microsoft.com/office/powerpoint/2010/main" val="3782415045"/>
+      </p:ext>
+    </p:extLst>
+  </p:cSld>
+  <p:clrMapOvr>
+    <a:masterClrMapping/>
+  </p:clrMapOvr>
+  <p:timing>
+    <p:tnLst>
+      <p:par>
+        <p:cTn id="1" dur="indefinite" restart="never" nodeType="tmRoot">
+          <p:childTnLst>
+            <p:seq concurrent="1" nextAc="seek">
+              <p:cTn id="2" dur="indefinite" nodeType="mainSeq">
+                <p:childTnLst>
+                  <p:par>
+                    <p:cTn id="3" fill="hold">
+                      <p:stCondLst>
+                        <p:cond delay="indefinite"/>
+                      </p:stCondLst>
+                      <p:childTnLst>
+                        <p:par>
+                          <p:cTn id="4" fill="hold">
+                            <p:stCondLst>
+                              <p:cond delay="0"/>
+                            </p:stCondLst>
+                            <p:childTnLst>
+                              <p:par>
+                                <p:cTn id="5" presetID="1" presetClass="entr" presetSubtype="0" fill="hold" nodeType="clickEffect">
+                                  <p:stCondLst>
+                                    <p:cond delay="0"/>
+                                  </p:stCondLst>
+                                  <p:childTnLst>
+                                    <p:set>
+                                      <p:cBhvr>
+                                        <p:cTn id="6" dur="1" fill="hold">
+                                          <p:stCondLst>
+                                            <p:cond delay="0"/>
+                                          </p:stCondLst>
+                                        </p:cTn>
+                                        <p:tgtEl>
+                                          <p:spTgt spid="11">
+                                            <p:txEl>
+                                              <p:pRg st="0" end="0"/>
+                                            </p:txEl>
+                                          </p:spTgt>
+                                        </p:tgtEl>
+                                        <p:attrNameLst>
+                                          <p:attrName>style.visibility</p:attrName>
+                                        </p:attrNameLst>
+                                      </p:cBhvr>
+                                      <p:to>
+                                        <p:strVal val="visible"/>
+                                      </p:to>
+                                    </p:set>
+                                  </p:childTnLst>
+                                </p:cTn>
+                              </p:par>
+                            </p:childTnLst>
+                          </p:cTn>
+                        </p:par>
+                      </p:childTnLst>
+                    </p:cTn>
+                  </p:par>
+                  <p:par>
+                    <p:cTn id="7" fill="hold">
+                      <p:stCondLst>
+                        <p:cond delay="indefinite"/>
+                      </p:stCondLst>
+                      <p:childTnLst>
+                        <p:par>
+                          <p:cTn id="8" fill="hold">
+                            <p:stCondLst>
+                              <p:cond delay="0"/>
+                            </p:stCondLst>
+                            <p:childTnLst>
+                              <p:par>
+                                <p:cTn id="9" presetID="1" presetClass="entr" presetSubtype="0" fill="hold" nodeType="clickEffect">
+                                  <p:stCondLst>
+                                    <p:cond delay="0"/>
+                                  </p:stCondLst>
+                                  <p:childTnLst>
+                                    <p:set>
+                                      <p:cBhvr>
+                                        <p:cTn id="10" dur="1" fill="hold">
+                                          <p:stCondLst>
+                                            <p:cond delay="0"/>
+                                          </p:stCondLst>
+                                        </p:cTn>
+                                        <p:tgtEl>
+                                          <p:spTgt spid="10"/>
+                                        </p:tgtEl>
+                                        <p:attrNameLst>
+                                          <p:attrName>style.visibility</p:attrName>
+                                        </p:attrNameLst>
+                                      </p:cBhvr>
+                                      <p:to>
+                                        <p:strVal val="visible"/>
+                                      </p:to>
+                                    </p:set>
+                                  </p:childTnLst>
+                                </p:cTn>
+                              </p:par>
+                            </p:childTnLst>
+                          </p:cTn>
+                        </p:par>
+                      </p:childTnLst>
+                    </p:cTn>
+                  </p:par>
+                  <p:par>
+                    <p:cTn id="11" fill="hold">
+                      <p:stCondLst>
+                        <p:cond delay="indefinite"/>
+                      </p:stCondLst>
+                      <p:childTnLst>
+                        <p:par>
+                          <p:cTn id="12" fill="hold">
+                            <p:stCondLst>
+                              <p:cond delay="0"/>
+                            </p:stCondLst>
+                            <p:childTnLst>
+                              <p:par>
+                                <p:cTn id="13" presetID="1" presetClass="entr" presetSubtype="0" fill="hold" nodeType="clickEffect">
+                                  <p:stCondLst>
+                                    <p:cond delay="0"/>
+                                  </p:stCondLst>
+                                  <p:childTnLst>
+                                    <p:set>
+                                      <p:cBhvr>
+                                        <p:cTn id="14" dur="1" fill="hold">
+                                          <p:stCondLst>
+                                            <p:cond delay="0"/>
+                                          </p:stCondLst>
+                                        </p:cTn>
+                                        <p:tgtEl>
+                                          <p:spTgt spid="13"/>
+                                        </p:tgtEl>
+                                        <p:attrNameLst>
+                                          <p:attrName>style.visibility</p:attrName>
+                                        </p:attrNameLst>
+                                      </p:cBhvr>
+                                      <p:to>
+                                        <p:strVal val="visible"/>
+                                      </p:to>
+                                    </p:set>
+                                  </p:childTnLst>
+                                </p:cTn>
+                              </p:par>
+                            </p:childTnLst>
+                          </p:cTn>
+                        </p:par>
+                      </p:childTnLst>
+                    </p:cTn>
+                  </p:par>
+                  <p:par>
+                    <p:cTn id="15" fill="hold">
+                      <p:stCondLst>
+                        <p:cond delay="indefinite"/>
+                      </p:stCondLst>
+                      <p:childTnLst>
+                        <p:par>
+                          <p:cTn id="16" fill="hold">
+                            <p:stCondLst>
+                              <p:cond delay="0"/>
+                            </p:stCondLst>
+                            <p:childTnLst>
+                              <p:par>
+                                <p:cTn id="17" presetID="1" presetClass="entr" presetSubtype="0" fill="hold" nodeType="clickEffect">
+                                  <p:stCondLst>
+                                    <p:cond delay="0"/>
+                                  </p:stCondLst>
+                                  <p:childTnLst>
+                                    <p:set>
+                                      <p:cBhvr>
+                                        <p:cTn id="18" dur="1" fill="hold">
+                                          <p:stCondLst>
+                                            <p:cond delay="0"/>
+                                          </p:stCondLst>
+                                        </p:cTn>
+                                        <p:tgtEl>
+                                          <p:spTgt spid="11">
+                                            <p:txEl>
+                                              <p:pRg st="8" end="8"/>
+                                            </p:txEl>
+                                          </p:spTgt>
+                                        </p:tgtEl>
+                                        <p:attrNameLst>
+                                          <p:attrName>style.visibility</p:attrName>
+                                        </p:attrNameLst>
+                                      </p:cBhvr>
+                                      <p:to>
+                                        <p:strVal val="visible"/>
+                                      </p:to>
+                                    </p:set>
+                                  </p:childTnLst>
+                                </p:cTn>
+                              </p:par>
+                            </p:childTnLst>
+                          </p:cTn>
+                        </p:par>
+                      </p:childTnLst>
+                    </p:cTn>
+                  </p:par>
+                </p:childTnLst>
+              </p:cTn>
+              <p:prevCondLst>
+                <p:cond evt="onPrev" delay="0">
+                  <p:tgtEl>
+                    <p:sldTgt/>
+                  </p:tgtEl>
+                </p:cond>
+              </p:prevCondLst>
+              <p:nextCondLst>
+                <p:cond evt="onNext" delay="0">
+                  <p:tgtEl>
+                    <p:sldTgt/>
+                  </p:tgtEl>
+                </p:cond>
+              </p:nextCondLst>
+            </p:seq>
+          </p:childTnLst>
+        </p:cTn>
+      </p:par>
+    </p:tnLst>
+  </p:timing>
+</p:sld>
+</file>
+
+<file path=ppt/slides/slide31.xml><?xml version="1.0" encoding="utf-8"?>
+<p:sld xmlns:a="http://schemas.openxmlformats.org/drawingml/2006/main" xmlns:r="http://schemas.openxmlformats.org/officeDocument/2006/relationships" xmlns:p="http://schemas.openxmlformats.org/presentationml/2006/main">
+  <p:cSld>
+    <p:spTree>
+      <p:nvGrpSpPr>
+        <p:cNvPr id="1" name="">
+          <a:extLst>
+            <a:ext uri="{FF2B5EF4-FFF2-40B4-BE49-F238E27FC236}">
               <a16:creationId xmlns:a16="http://schemas.microsoft.com/office/drawing/2014/main" id="{F283F426-5200-2081-D734-3DE99C0BDBC7}"/>
             </a:ext>
           </a:extLst>
@@ -40785,7 +41341,7 @@
           <a:p>
             <a:fld id="{334F72C3-CDF3-44A8-B602-1649B1728485}" type="datetime3">
               <a:rPr lang="en-US" smtClean="0"/>
-              <a:t>2 June 2026</a:t>
+              <a:t>3 June 2026</a:t>
             </a:fld>
             <a:endParaRPr lang="en-US"/>
           </a:p>
@@ -40815,7 +41371,7 @@
             <a:fld id="{64E5BE4B-2FBF-4174-9E62-85FAD1CB43A6}" type="slidenum">
               <a:rPr lang="en-US" smtClean="0"/>
               <a:pPr/>
-              <a:t>30</a:t>
+              <a:t>31</a:t>
             </a:fld>
             <a:endParaRPr lang="en-US"/>
           </a:p>
@@ -41202,7 +41758,7 @@
 </p:sld>
 </file>
 
-<file path=ppt/slides/slide31.xml><?xml version="1.0" encoding="utf-8"?>
+<file path=ppt/slides/slide32.xml><?xml version="1.0" encoding="utf-8"?>
 <p:sld xmlns:a="http://schemas.openxmlformats.org/drawingml/2006/main" xmlns:r="http://schemas.openxmlformats.org/officeDocument/2006/relationships" xmlns:p="http://schemas.openxmlformats.org/presentationml/2006/main">
   <p:cSld>
     <p:spTree>
@@ -41248,7 +41804,7 @@
           <a:p>
             <a:fld id="{334F72C3-CDF3-44A8-B602-1649B1728485}" type="datetime3">
               <a:rPr lang="en-US" smtClean="0"/>
-              <a:t>2 June 2026</a:t>
+              <a:t>3 June 2026</a:t>
             </a:fld>
             <a:endParaRPr lang="en-US"/>
           </a:p>
@@ -41278,7 +41834,7 @@
             <a:fld id="{64E5BE4B-2FBF-4174-9E62-85FAD1CB43A6}" type="slidenum">
               <a:rPr lang="en-US" smtClean="0"/>
               <a:pPr/>
-              <a:t>31</a:t>
+              <a:t>32</a:t>
             </a:fld>
             <a:endParaRPr lang="en-US"/>
           </a:p>
@@ -41531,7 +42087,7 @@
 </p:sld>
 </file>
 
-<file path=ppt/slides/slide32.xml><?xml version="1.0" encoding="utf-8"?>
+<file path=ppt/slides/slide33.xml><?xml version="1.0" encoding="utf-8"?>
 <p:sld xmlns:a="http://schemas.openxmlformats.org/drawingml/2006/main" xmlns:r="http://schemas.openxmlformats.org/officeDocument/2006/relationships" xmlns:p="http://schemas.openxmlformats.org/presentationml/2006/main">
   <p:cSld>
     <p:spTree>
@@ -41577,7 +42133,7 @@
           <a:p>
             <a:fld id="{334F72C3-CDF3-44A8-B602-1649B1728485}" type="datetime3">
               <a:rPr lang="en-US" smtClean="0"/>
-              <a:t>2 June 2026</a:t>
+              <a:t>3 June 2026</a:t>
             </a:fld>
             <a:endParaRPr lang="en-US"/>
           </a:p>
@@ -41607,7 +42163,7 @@
             <a:fld id="{64E5BE4B-2FBF-4174-9E62-85FAD1CB43A6}" type="slidenum">
               <a:rPr lang="en-US" smtClean="0"/>
               <a:pPr/>
-              <a:t>32</a:t>
+              <a:t>33</a:t>
             </a:fld>
             <a:endParaRPr lang="en-US"/>
           </a:p>
@@ -41983,7 +42539,7 @@
 </p:sld>
 </file>
 
-<file path=ppt/slides/slide33.xml><?xml version="1.0" encoding="utf-8"?>
+<file path=ppt/slides/slide34.xml><?xml version="1.0" encoding="utf-8"?>
 <p:sld xmlns:a="http://schemas.openxmlformats.org/drawingml/2006/main" xmlns:r="http://schemas.openxmlformats.org/officeDocument/2006/relationships" xmlns:p="http://schemas.openxmlformats.org/presentationml/2006/main">
   <p:cSld>
     <p:spTree>
@@ -42158,7 +42714,7 @@
 </p:sld>
 </file>
 
-<file path=ppt/slides/slide34.xml><?xml version="1.0" encoding="utf-8"?>
+<file path=ppt/slides/slide35.xml><?xml version="1.0" encoding="utf-8"?>
 <p:sld xmlns:a="http://schemas.openxmlformats.org/drawingml/2006/main" xmlns:r="http://schemas.openxmlformats.org/officeDocument/2006/relationships" xmlns:p="http://schemas.openxmlformats.org/presentationml/2006/main">
   <p:cSld>
     <p:spTree>
@@ -42777,7 +43333,7 @@
 </p:sld>
 </file>
 
-<file path=ppt/slides/slide35.xml><?xml version="1.0" encoding="utf-8"?>
+<file path=ppt/slides/slide36.xml><?xml version="1.0" encoding="utf-8"?>
 <p:sld xmlns:a="http://schemas.openxmlformats.org/drawingml/2006/main" xmlns:r="http://schemas.openxmlformats.org/officeDocument/2006/relationships" xmlns:p="http://schemas.openxmlformats.org/presentationml/2006/main">
   <p:cSld>
     <p:spTree>
@@ -42852,7 +43408,7 @@
           <a:p>
             <a:fld id="{AD622D1A-DF83-41A8-85FF-04D90BF831D3}" type="datetime3">
               <a:rPr lang="en-US" smtClean="0"/>
-              <a:t>2 June 2026</a:t>
+              <a:t>3 June 2026</a:t>
             </a:fld>
             <a:endParaRPr lang="en-US"/>
           </a:p>
@@ -42882,7 +43438,7 @@
             <a:fld id="{64E5BE4B-2FBF-4174-9E62-85FAD1CB43A6}" type="slidenum">
               <a:rPr lang="en-US" smtClean="0"/>
               <a:pPr/>
-              <a:t>35</a:t>
+              <a:t>36</a:t>
             </a:fld>
             <a:endParaRPr lang="en-US"/>
           </a:p>
@@ -42902,6 +43458,161 @@
 </file>
 
 <file path=ppt/slides/slide4.xml><?xml version="1.0" encoding="utf-8"?>
+<p:sld xmlns:a="http://schemas.openxmlformats.org/drawingml/2006/main" xmlns:r="http://schemas.openxmlformats.org/officeDocument/2006/relationships" xmlns:p="http://schemas.openxmlformats.org/presentationml/2006/main">
+  <p:cSld>
+    <p:spTree>
+      <p:nvGrpSpPr>
+        <p:cNvPr id="1" name="">
+          <a:extLst>
+            <a:ext uri="{FF2B5EF4-FFF2-40B4-BE49-F238E27FC236}">
+              <a16:creationId xmlns:a16="http://schemas.microsoft.com/office/drawing/2014/main" id="{372D87CF-5E92-D709-ADC1-CD5AB2C3F775}"/>
+            </a:ext>
+          </a:extLst>
+        </p:cNvPr>
+        <p:cNvGrpSpPr/>
+        <p:nvPr/>
+      </p:nvGrpSpPr>
+      <p:grpSpPr>
+        <a:xfrm>
+          <a:off x="0" y="0"/>
+          <a:ext cx="0" cy="0"/>
+          <a:chOff x="0" y="0"/>
+          <a:chExt cx="0" cy="0"/>
+        </a:xfrm>
+      </p:grpSpPr>
+      <p:sp>
+        <p:nvSpPr>
+          <p:cNvPr id="2" name="Title 1">
+            <a:extLst>
+              <a:ext uri="{FF2B5EF4-FFF2-40B4-BE49-F238E27FC236}">
+                <a16:creationId xmlns:a16="http://schemas.microsoft.com/office/drawing/2014/main" id="{2AEBB9CF-99E0-34C2-13BD-CE711791B329}"/>
+              </a:ext>
+            </a:extLst>
+          </p:cNvPr>
+          <p:cNvSpPr>
+            <a:spLocks noGrp="1"/>
+          </p:cNvSpPr>
+          <p:nvPr>
+            <p:ph type="title"/>
+          </p:nvPr>
+        </p:nvSpPr>
+        <p:spPr/>
+        <p:txBody>
+          <a:bodyPr/>
+          <a:lstStyle/>
+          <a:p>
+            <a:br>
+              <a:rPr lang="en-US" dirty="0"/>
+            </a:br>
+            <a:r>
+              <a:rPr lang="en-US" dirty="0"/>
+              <a:t>Course Schedule</a:t>
+            </a:r>
+          </a:p>
+        </p:txBody>
+      </p:sp>
+      <p:pic>
+        <p:nvPicPr>
+          <p:cNvPr id="7" name="Content Placeholder 6">
+            <a:extLst>
+              <a:ext uri="{FF2B5EF4-FFF2-40B4-BE49-F238E27FC236}">
+                <a16:creationId xmlns:a16="http://schemas.microsoft.com/office/drawing/2014/main" id="{D6C03BA8-C242-A7E3-06B9-2FDDD142A3E2}"/>
+              </a:ext>
+            </a:extLst>
+          </p:cNvPr>
+          <p:cNvPicPr>
+            <a:picLocks noGrp="1" noChangeAspect="1"/>
+          </p:cNvPicPr>
+          <p:nvPr>
+            <p:ph idx="1"/>
+          </p:nvPr>
+        </p:nvPicPr>
+        <p:blipFill>
+          <a:blip r:embed="rId3"/>
+          <a:stretch>
+            <a:fillRect/>
+          </a:stretch>
+        </p:blipFill>
+        <p:spPr>
+          <a:xfrm>
+            <a:off x="381000" y="989100"/>
+            <a:ext cx="8382000" cy="3716356"/>
+          </a:xfrm>
+          <a:prstGeom prst="rect">
+            <a:avLst/>
+          </a:prstGeom>
+          <a:noFill/>
+          <a:ln>
+            <a:noFill/>
+          </a:ln>
+        </p:spPr>
+      </p:pic>
+      <p:sp>
+        <p:nvSpPr>
+          <p:cNvPr id="8" name="Rectangle 7">
+            <a:extLst>
+              <a:ext uri="{FF2B5EF4-FFF2-40B4-BE49-F238E27FC236}">
+                <a16:creationId xmlns:a16="http://schemas.microsoft.com/office/drawing/2014/main" id="{0C366FE1-DAFA-E7EC-025F-E1D1E8686851}"/>
+              </a:ext>
+            </a:extLst>
+          </p:cNvPr>
+          <p:cNvSpPr/>
+          <p:nvPr/>
+        </p:nvSpPr>
+        <p:spPr>
+          <a:xfrm>
+            <a:off x="148683" y="1605782"/>
+            <a:ext cx="4713249" cy="230458"/>
+          </a:xfrm>
+          <a:prstGeom prst="rect">
+            <a:avLst/>
+          </a:prstGeom>
+          <a:noFill/>
+          <a:ln w="38100">
+            <a:solidFill>
+              <a:srgbClr val="FF0000"/>
+            </a:solidFill>
+          </a:ln>
+        </p:spPr>
+        <p:style>
+          <a:lnRef idx="2">
+            <a:schemeClr val="accent1">
+              <a:shade val="15000"/>
+            </a:schemeClr>
+          </a:lnRef>
+          <a:fillRef idx="1">
+            <a:schemeClr val="accent1"/>
+          </a:fillRef>
+          <a:effectRef idx="0">
+            <a:schemeClr val="accent1"/>
+          </a:effectRef>
+          <a:fontRef idx="minor">
+            <a:schemeClr val="lt1"/>
+          </a:fontRef>
+        </p:style>
+        <p:txBody>
+          <a:bodyPr rtlCol="0" anchor="ctr"/>
+          <a:lstStyle/>
+          <a:p>
+            <a:pPr algn="ctr"/>
+            <a:endParaRPr lang="en-US"/>
+          </a:p>
+        </p:txBody>
+      </p:sp>
+    </p:spTree>
+    <p:extLst>
+      <p:ext uri="{BB962C8B-B14F-4D97-AF65-F5344CB8AC3E}">
+        <p14:creationId xmlns:p14="http://schemas.microsoft.com/office/powerpoint/2010/main" val="1919185427"/>
+      </p:ext>
+    </p:extLst>
+  </p:cSld>
+  <p:clrMapOvr>
+    <a:masterClrMapping/>
+  </p:clrMapOvr>
+</p:sld>
+</file>
+
+<file path=ppt/slides/slide5.xml><?xml version="1.0" encoding="utf-8"?>
 <p:sld xmlns:a="http://schemas.openxmlformats.org/drawingml/2006/main" xmlns:r="http://schemas.openxmlformats.org/officeDocument/2006/relationships" xmlns:p="http://schemas.openxmlformats.org/presentationml/2006/main">
   <p:cSld>
     <p:spTree>
@@ -43091,7 +43802,7 @@
 </p:sld>
 </file>
 
-<file path=ppt/slides/slide5.xml><?xml version="1.0" encoding="utf-8"?>
+<file path=ppt/slides/slide6.xml><?xml version="1.0" encoding="utf-8"?>
 <p:sld xmlns:a="http://schemas.openxmlformats.org/drawingml/2006/main" xmlns:r="http://schemas.openxmlformats.org/officeDocument/2006/relationships" xmlns:p="http://schemas.openxmlformats.org/presentationml/2006/main">
   <p:cSld>
     <p:spTree>
@@ -43238,7 +43949,7 @@
 </p:sld>
 </file>
 
-<file path=ppt/slides/slide6.xml><?xml version="1.0" encoding="utf-8"?>
+<file path=ppt/slides/slide7.xml><?xml version="1.0" encoding="utf-8"?>
 <p:sld xmlns:a="http://schemas.openxmlformats.org/drawingml/2006/main" xmlns:r="http://schemas.openxmlformats.org/officeDocument/2006/relationships" xmlns:p="http://schemas.openxmlformats.org/presentationml/2006/main">
   <p:cSld>
     <p:spTree>
@@ -43448,7 +44159,7 @@
           <a:p>
             <a:fld id="{AD622D1A-DF83-41A8-85FF-04D90BF831D3}" type="datetime3">
               <a:rPr lang="en-US" smtClean="0"/>
-              <a:t>2 June 2026</a:t>
+              <a:t>3 June 2026</a:t>
             </a:fld>
             <a:endParaRPr lang="en-US"/>
           </a:p>
@@ -43478,7 +44189,7 @@
             <a:fld id="{64E5BE4B-2FBF-4174-9E62-85FAD1CB43A6}" type="slidenum">
               <a:rPr lang="en-US" smtClean="0"/>
               <a:pPr/>
-              <a:t>6</a:t>
+              <a:t>7</a:t>
             </a:fld>
             <a:endParaRPr lang="en-US"/>
           </a:p>
@@ -43497,7 +44208,7 @@
 </p:sld>
 </file>
 
-<file path=ppt/slides/slide7.xml><?xml version="1.0" encoding="utf-8"?>
+<file path=ppt/slides/slide8.xml><?xml version="1.0" encoding="utf-8"?>
 <p:sld xmlns:a="http://schemas.openxmlformats.org/drawingml/2006/main" xmlns:r="http://schemas.openxmlformats.org/officeDocument/2006/relationships" xmlns:p="http://schemas.openxmlformats.org/presentationml/2006/main">
   <p:cSld>
     <p:spTree>
@@ -44302,7 +45013,7 @@
 </p:sld>
 </file>
 
-<file path=ppt/slides/slide8.xml><?xml version="1.0" encoding="utf-8"?>
+<file path=ppt/slides/slide9.xml><?xml version="1.0" encoding="utf-8"?>
 <p:sld xmlns:a="http://schemas.openxmlformats.org/drawingml/2006/main" xmlns:r="http://schemas.openxmlformats.org/officeDocument/2006/relationships" xmlns:p="http://schemas.openxmlformats.org/presentationml/2006/main">
   <p:cSld>
     <p:spTree>
@@ -44468,7 +45179,7 @@
           <a:p>
             <a:fld id="{334F72C3-CDF3-44A8-B602-1649B1728485}" type="datetime3">
               <a:rPr lang="en-US" smtClean="0"/>
-              <a:t>2 June 2026</a:t>
+              <a:t>3 June 2026</a:t>
             </a:fld>
             <a:endParaRPr lang="en-US"/>
           </a:p>
@@ -44498,7 +45209,7 @@
             <a:fld id="{64E5BE4B-2FBF-4174-9E62-85FAD1CB43A6}" type="slidenum">
               <a:rPr lang="en-US" smtClean="0"/>
               <a:pPr/>
-              <a:t>8</a:t>
+              <a:t>9</a:t>
             </a:fld>
             <a:endParaRPr lang="en-US"/>
           </a:p>
@@ -44693,448 +45404,6 @@
     <p:bldLst>
       <p:bldP spid="4" grpId="0" build="p"/>
     </p:bldLst>
-  </p:timing>
-</p:sld>
-</file>
-
-<file path=ppt/slides/slide9.xml><?xml version="1.0" encoding="utf-8"?>
-<p:sld xmlns:a="http://schemas.openxmlformats.org/drawingml/2006/main" xmlns:r="http://schemas.openxmlformats.org/officeDocument/2006/relationships" xmlns:p="http://schemas.openxmlformats.org/presentationml/2006/main">
-  <p:cSld>
-    <p:spTree>
-      <p:nvGrpSpPr>
-        <p:cNvPr id="1" name="Shape 311"/>
-        <p:cNvGrpSpPr/>
-        <p:nvPr/>
-      </p:nvGrpSpPr>
-      <p:grpSpPr>
-        <a:xfrm>
-          <a:off x="0" y="0"/>
-          <a:ext cx="0" cy="0"/>
-          <a:chOff x="0" y="0"/>
-          <a:chExt cx="0" cy="0"/>
-        </a:xfrm>
-      </p:grpSpPr>
-      <p:sp>
-        <p:nvSpPr>
-          <p:cNvPr id="312" name="Google Shape;312;p54"/>
-          <p:cNvSpPr txBox="1">
-            <a:spLocks noGrp="1"/>
-          </p:cNvSpPr>
-          <p:nvPr>
-            <p:ph type="title"/>
-          </p:nvPr>
-        </p:nvSpPr>
-        <p:spPr>
-          <a:noFill/>
-          <a:ln>
-            <a:noFill/>
-          </a:ln>
-        </p:spPr>
-        <p:txBody>
-          <a:bodyPr spcFirstLastPara="1" wrap="square" lIns="91425" tIns="45700" rIns="91425" bIns="45700" anchor="ctr" anchorCtr="0">
-            <a:normAutofit/>
-          </a:bodyPr>
-          <a:lstStyle/>
-          <a:p>
-            <a:pPr lvl="0"/>
-            <a:r>
-              <a:rPr lang="en-US"/>
-              <a:t>Data Type Conversion (Casting)</a:t>
-            </a:r>
-          </a:p>
-        </p:txBody>
-      </p:sp>
-      <p:pic>
-        <p:nvPicPr>
-          <p:cNvPr id="8" name="Content Placeholder 7">
-            <a:extLst>
-              <a:ext uri="{FF2B5EF4-FFF2-40B4-BE49-F238E27FC236}">
-                <a16:creationId xmlns:a16="http://schemas.microsoft.com/office/drawing/2014/main" id="{47C5B9A8-13B2-1DF9-516C-B276FB4C4EF2}"/>
-              </a:ext>
-            </a:extLst>
-          </p:cNvPr>
-          <p:cNvPicPr>
-            <a:picLocks noGrp="1" noChangeAspect="1"/>
-          </p:cNvPicPr>
-          <p:nvPr>
-            <p:ph sz="half" idx="1"/>
-          </p:nvPr>
-        </p:nvPicPr>
-        <p:blipFill>
-          <a:blip r:embed="rId3"/>
-          <a:stretch>
-            <a:fillRect/>
-          </a:stretch>
-        </p:blipFill>
-        <p:spPr>
-          <a:xfrm>
-            <a:off x="950196" y="1357428"/>
-            <a:ext cx="2990850" cy="2266950"/>
-          </a:xfrm>
-          <a:prstGeom prst="rect">
-            <a:avLst/>
-          </a:prstGeom>
-          <a:noFill/>
-          <a:ln>
-            <a:noFill/>
-          </a:ln>
-        </p:spPr>
-      </p:pic>
-      <p:sp>
-        <p:nvSpPr>
-          <p:cNvPr id="10" name="Content Placeholder 9">
-            <a:extLst>
-              <a:ext uri="{FF2B5EF4-FFF2-40B4-BE49-F238E27FC236}">
-                <a16:creationId xmlns:a16="http://schemas.microsoft.com/office/drawing/2014/main" id="{CB64C403-3397-DF2F-D446-1511CACE4815}"/>
-              </a:ext>
-            </a:extLst>
-          </p:cNvPr>
-          <p:cNvSpPr>
-            <a:spLocks noGrp="1"/>
-          </p:cNvSpPr>
-          <p:nvPr>
-            <p:ph sz="half" idx="2"/>
-          </p:nvPr>
-        </p:nvSpPr>
-        <p:spPr>
-          <a:xfrm>
-            <a:off x="4434095" y="1405889"/>
-            <a:ext cx="4023360" cy="3429000"/>
-          </a:xfrm>
-        </p:spPr>
-        <p:txBody>
-          <a:bodyPr/>
-          <a:lstStyle/>
-          <a:p>
-            <a:r>
-              <a:rPr lang="en-US" dirty="0"/>
-              <a:t>There are predefined </a:t>
-            </a:r>
-            <a:r>
-              <a:rPr lang="en-US" i="1" dirty="0"/>
-              <a:t>functions </a:t>
-            </a:r>
-            <a:r>
-              <a:rPr lang="en-US" dirty="0"/>
-              <a:t>we can use to </a:t>
-            </a:r>
-            <a:r>
-              <a:rPr lang="en-US" i="1" dirty="0"/>
-              <a:t>explicitly</a:t>
-            </a:r>
-            <a:r>
-              <a:rPr lang="en-US" dirty="0"/>
-              <a:t> convert data from one type to another: </a:t>
-            </a:r>
-          </a:p>
-          <a:p>
-            <a:pPr lvl="1"/>
-            <a:r>
-              <a:rPr lang="en-US" dirty="0"/>
-              <a:t>int()</a:t>
-            </a:r>
-          </a:p>
-          <a:p>
-            <a:pPr lvl="1"/>
-            <a:r>
-              <a:rPr lang="en-US" dirty="0"/>
-              <a:t>float()</a:t>
-            </a:r>
-          </a:p>
-          <a:p>
-            <a:pPr lvl="1"/>
-            <a:r>
-              <a:rPr lang="en-US" dirty="0"/>
-              <a:t>str()</a:t>
-            </a:r>
-          </a:p>
-          <a:p>
-            <a:pPr lvl="1"/>
-            <a:r>
-              <a:rPr lang="en-US" dirty="0"/>
-              <a:t>bool()</a:t>
-            </a:r>
-          </a:p>
-          <a:p>
-            <a:endParaRPr lang="en-US" dirty="0"/>
-          </a:p>
-        </p:txBody>
-      </p:sp>
-    </p:spTree>
-  </p:cSld>
-  <p:clrMapOvr>
-    <a:masterClrMapping/>
-  </p:clrMapOvr>
-  <p:timing>
-    <p:tnLst>
-      <p:par>
-        <p:cTn id="1" dur="indefinite" restart="never" nodeType="tmRoot">
-          <p:childTnLst>
-            <p:seq concurrent="1" nextAc="seek">
-              <p:cTn id="2" dur="indefinite" nodeType="mainSeq">
-                <p:childTnLst>
-                  <p:par>
-                    <p:cTn id="3" fill="hold">
-                      <p:stCondLst>
-                        <p:cond delay="indefinite"/>
-                      </p:stCondLst>
-                      <p:childTnLst>
-                        <p:par>
-                          <p:cTn id="4" fill="hold">
-                            <p:stCondLst>
-                              <p:cond delay="0"/>
-                            </p:stCondLst>
-                            <p:childTnLst>
-                              <p:par>
-                                <p:cTn id="5" presetID="1" presetClass="entr" presetSubtype="0" fill="hold" nodeType="clickEffect">
-                                  <p:stCondLst>
-                                    <p:cond delay="0"/>
-                                  </p:stCondLst>
-                                  <p:childTnLst>
-                                    <p:set>
-                                      <p:cBhvr>
-                                        <p:cTn id="6" dur="1" fill="hold">
-                                          <p:stCondLst>
-                                            <p:cond delay="0"/>
-                                          </p:stCondLst>
-                                        </p:cTn>
-                                        <p:tgtEl>
-                                          <p:spTgt spid="10">
-                                            <p:txEl>
-                                              <p:pRg st="1" end="1"/>
-                                            </p:txEl>
-                                          </p:spTgt>
-                                        </p:tgtEl>
-                                        <p:attrNameLst>
-                                          <p:attrName>style.visibility</p:attrName>
-                                        </p:attrNameLst>
-                                      </p:cBhvr>
-                                      <p:to>
-                                        <p:strVal val="visible"/>
-                                      </p:to>
-                                    </p:set>
-                                  </p:childTnLst>
-                                </p:cTn>
-                              </p:par>
-                            </p:childTnLst>
-                          </p:cTn>
-                        </p:par>
-                      </p:childTnLst>
-                    </p:cTn>
-                  </p:par>
-                  <p:par>
-                    <p:cTn id="7" fill="hold">
-                      <p:stCondLst>
-                        <p:cond delay="indefinite"/>
-                      </p:stCondLst>
-                      <p:childTnLst>
-                        <p:par>
-                          <p:cTn id="8" fill="hold">
-                            <p:stCondLst>
-                              <p:cond delay="0"/>
-                            </p:stCondLst>
-                            <p:childTnLst>
-                              <p:par>
-                                <p:cTn id="9" presetID="1" presetClass="entr" presetSubtype="0" fill="hold" nodeType="clickEffect">
-                                  <p:stCondLst>
-                                    <p:cond delay="0"/>
-                                  </p:stCondLst>
-                                  <p:childTnLst>
-                                    <p:set>
-                                      <p:cBhvr>
-                                        <p:cTn id="10" dur="1" fill="hold">
-                                          <p:stCondLst>
-                                            <p:cond delay="0"/>
-                                          </p:stCondLst>
-                                        </p:cTn>
-                                        <p:tgtEl>
-                                          <p:spTgt spid="10">
-                                            <p:txEl>
-                                              <p:pRg st="2" end="2"/>
-                                            </p:txEl>
-                                          </p:spTgt>
-                                        </p:tgtEl>
-                                        <p:attrNameLst>
-                                          <p:attrName>style.visibility</p:attrName>
-                                        </p:attrNameLst>
-                                      </p:cBhvr>
-                                      <p:to>
-                                        <p:strVal val="visible"/>
-                                      </p:to>
-                                    </p:set>
-                                  </p:childTnLst>
-                                </p:cTn>
-                              </p:par>
-                            </p:childTnLst>
-                          </p:cTn>
-                        </p:par>
-                      </p:childTnLst>
-                    </p:cTn>
-                  </p:par>
-                  <p:par>
-                    <p:cTn id="11" fill="hold">
-                      <p:stCondLst>
-                        <p:cond delay="indefinite"/>
-                      </p:stCondLst>
-                      <p:childTnLst>
-                        <p:par>
-                          <p:cTn id="12" fill="hold">
-                            <p:stCondLst>
-                              <p:cond delay="0"/>
-                            </p:stCondLst>
-                            <p:childTnLst>
-                              <p:par>
-                                <p:cTn id="13" presetID="1" presetClass="entr" presetSubtype="0" fill="hold" nodeType="clickEffect">
-                                  <p:stCondLst>
-                                    <p:cond delay="0"/>
-                                  </p:stCondLst>
-                                  <p:childTnLst>
-                                    <p:set>
-                                      <p:cBhvr>
-                                        <p:cTn id="14" dur="1" fill="hold">
-                                          <p:stCondLst>
-                                            <p:cond delay="0"/>
-                                          </p:stCondLst>
-                                        </p:cTn>
-                                        <p:tgtEl>
-                                          <p:spTgt spid="10">
-                                            <p:txEl>
-                                              <p:pRg st="3" end="3"/>
-                                            </p:txEl>
-                                          </p:spTgt>
-                                        </p:tgtEl>
-                                        <p:attrNameLst>
-                                          <p:attrName>style.visibility</p:attrName>
-                                        </p:attrNameLst>
-                                      </p:cBhvr>
-                                      <p:to>
-                                        <p:strVal val="visible"/>
-                                      </p:to>
-                                    </p:set>
-                                  </p:childTnLst>
-                                </p:cTn>
-                              </p:par>
-                            </p:childTnLst>
-                          </p:cTn>
-                        </p:par>
-                      </p:childTnLst>
-                    </p:cTn>
-                  </p:par>
-                  <p:par>
-                    <p:cTn id="15" fill="hold">
-                      <p:stCondLst>
-                        <p:cond delay="indefinite"/>
-                      </p:stCondLst>
-                      <p:childTnLst>
-                        <p:par>
-                          <p:cTn id="16" fill="hold">
-                            <p:stCondLst>
-                              <p:cond delay="0"/>
-                            </p:stCondLst>
-                            <p:childTnLst>
-                              <p:par>
-                                <p:cTn id="17" presetID="1" presetClass="entr" presetSubtype="0" fill="hold" nodeType="clickEffect">
-                                  <p:stCondLst>
-                                    <p:cond delay="0"/>
-                                  </p:stCondLst>
-                                  <p:childTnLst>
-                                    <p:set>
-                                      <p:cBhvr>
-                                        <p:cTn id="18" dur="1" fill="hold">
-                                          <p:stCondLst>
-                                            <p:cond delay="0"/>
-                                          </p:stCondLst>
-                                        </p:cTn>
-                                        <p:tgtEl>
-                                          <p:spTgt spid="10">
-                                            <p:txEl>
-                                              <p:pRg st="4" end="4"/>
-                                            </p:txEl>
-                                          </p:spTgt>
-                                        </p:tgtEl>
-                                        <p:attrNameLst>
-                                          <p:attrName>style.visibility</p:attrName>
-                                        </p:attrNameLst>
-                                      </p:cBhvr>
-                                      <p:to>
-                                        <p:strVal val="visible"/>
-                                      </p:to>
-                                    </p:set>
-                                  </p:childTnLst>
-                                </p:cTn>
-                              </p:par>
-                            </p:childTnLst>
-                          </p:cTn>
-                        </p:par>
-                      </p:childTnLst>
-                    </p:cTn>
-                  </p:par>
-                  <p:par>
-                    <p:cTn id="19" fill="hold">
-                      <p:stCondLst>
-                        <p:cond delay="indefinite"/>
-                      </p:stCondLst>
-                      <p:childTnLst>
-                        <p:par>
-                          <p:cTn id="20" fill="hold">
-                            <p:stCondLst>
-                              <p:cond delay="0"/>
-                            </p:stCondLst>
-                            <p:childTnLst>
-                              <p:par>
-                                <p:cTn id="21" presetID="1" presetClass="entr" presetSubtype="0" fill="hold" nodeType="clickEffect">
-                                  <p:stCondLst>
-                                    <p:cond delay="0"/>
-                                  </p:stCondLst>
-                                  <p:childTnLst>
-                                    <p:set>
-                                      <p:cBhvr>
-                                        <p:cTn id="22" dur="1" fill="hold">
-                                          <p:stCondLst>
-                                            <p:cond delay="0"/>
-                                          </p:stCondLst>
-                                        </p:cTn>
-                                        <p:tgtEl>
-                                          <p:spTgt spid="8"/>
-                                        </p:tgtEl>
-                                        <p:attrNameLst>
-                                          <p:attrName>style.visibility</p:attrName>
-                                        </p:attrNameLst>
-                                      </p:cBhvr>
-                                      <p:to>
-                                        <p:strVal val="visible"/>
-                                      </p:to>
-                                    </p:set>
-                                  </p:childTnLst>
-                                </p:cTn>
-                              </p:par>
-                            </p:childTnLst>
-                          </p:cTn>
-                        </p:par>
-                      </p:childTnLst>
-                    </p:cTn>
-                  </p:par>
-                </p:childTnLst>
-              </p:cTn>
-              <p:prevCondLst>
-                <p:cond evt="onPrev" delay="0">
-                  <p:tgtEl>
-                    <p:sldTgt/>
-                  </p:tgtEl>
-                </p:cond>
-              </p:prevCondLst>
-              <p:nextCondLst>
-                <p:cond evt="onNext" delay="0">
-                  <p:tgtEl>
-                    <p:sldTgt/>
-                  </p:tgtEl>
-                </p:cond>
-              </p:nextCondLst>
-            </p:seq>
-          </p:childTnLst>
-        </p:cTn>
-      </p:par>
-    </p:tnLst>
   </p:timing>
 </p:sld>
 </file>
